--- a/dist/초5/수학/분수의성질/초5_수학_분수의성질_01_크기가같은분수_학생용.pptx
+++ b/dist/초5/수학/분수의성질/초5_수학_분수의성질_01_크기가같은분수_학생용.pptx
@@ -120,13 +120,13 @@
   <p:extLst>
     <p:ext uri="{521415D9-36F7-43E2-AB2F-B90AF26B5E84}">
       <p14:sectionLst xmlns:p14="http://schemas.microsoft.com/office/powerpoint/2010/main">
-        <p14:section name="도입" id="{a2114fb1-1088-856c-1108-931e6c2c9f7b}">
+        <p14:section name="도입" id="{7777719f-18f0-1207-f0b4-2ce6a8312d14}">
           <p14:sldIdLst>
             <p14:sldId id="256"/>
             <p14:sldId id="257"/>
           </p14:sldIdLst>
         </p14:section>
-        <p14:section name="개념" id="{1176f716-be46-b4d0-46e4-3ccb8c62d7ed}">
+        <p14:section name="개념" id="{9c88c62c-bd03-12d7-7b2d-20d151d33074}">
           <p14:sldIdLst>
             <p14:sldId id="258"/>
             <p14:sldId id="259"/>
@@ -136,24 +136,24 @@
             <p14:sldId id="263"/>
           </p14:sldIdLst>
         </p14:section>
-        <p14:section name="연습" id="{412839fc-0b0b-c151-593a-9ee99fbfced9}">
+        <p14:section name="연습" id="{f6a39105-4348-7930-8e75-9de82079e9dc}">
           <p14:sldIdLst>
             <p14:sldId id="264"/>
             <p14:sldId id="265"/>
           </p14:sldIdLst>
         </p14:section>
-        <p14:section name="확인" id="{a4952734-4e80-7e5d-20ee-f9543a601d6c}">
+        <p14:section name="확인" id="{825eb701-9230-884b-af7b-d3a6591633ed}">
           <p14:sldIdLst>
             <p14:sldId id="266"/>
             <p14:sldId id="267"/>
           </p14:sldIdLst>
         </p14:section>
-        <p14:section name="정리" id="{8c674316-6361-0910-7a9e-f1b5937ca66a}">
+        <p14:section name="정리" id="{e877f9a3-10e1-a81f-eefd-2e9b2e9cad4f}">
           <p14:sldIdLst>
             <p14:sldId id="268"/>
           </p14:sldIdLst>
         </p14:section>
-        <p14:section name="보충" id="{dfd52ca1-c8b9-a585-544f-8aaeab349dd3}">
+        <p14:section name="보충" id="{e72f7041-cec1-a839-5d4e-70e7f0555ad6}">
           <p14:sldIdLst>
             <p14:sldId id="269"/>
           </p14:sldIdLst>
@@ -1813,7 +1813,7 @@
         <p:spPr>
           <a:xfrm>
             <a:off x="731520" y="640080"/>
-            <a:ext cx="6583680" cy="1188720"/>
+            <a:ext cx="6675120" cy="1188720"/>
           </a:xfrm>
           <a:prstGeom prst="rect">
             <a:avLst/>
@@ -1826,7 +1826,7 @@
           <a:lstStyle>
             <a:lvl1pPr algn="l" indent="0" marL="0">
               <a:buNone/>
-              <a:defRPr lang="en-US" sz="4800" b="1" dirty="0">
+              <a:defRPr lang="en-US" sz="4600" b="1" dirty="0">
                 <a:solidFill>
                   <a:srgbClr val="FFFFFF"/>
                 </a:solidFill>
@@ -1840,7 +1840,7 @@
             <a:pPr algn="l" indent="0" marL="0">
               <a:buNone/>
             </a:pPr>
-            <a:endParaRPr lang="en-US" sz="4800" dirty="0"/>
+            <a:endParaRPr lang="en-US" sz="4600" dirty="0"/>
           </a:p>
         </p:txBody>
       </p:sp>
@@ -1855,7 +1855,7 @@
         <p:spPr>
           <a:xfrm>
             <a:off x="731520" y="1920240"/>
-            <a:ext cx="6583680" cy="1645920"/>
+            <a:ext cx="6675120" cy="1645920"/>
           </a:xfrm>
           <a:prstGeom prst="rect">
             <a:avLst/>
@@ -1868,7 +1868,7 @@
           <a:lstStyle>
             <a:lvl1pPr indent="0" marL="0">
               <a:buNone/>
-              <a:defRPr lang="en-US" sz="3000" dirty="0">
+              <a:defRPr lang="en-US" sz="2800" dirty="0">
                 <a:solidFill>
                   <a:srgbClr val="C9DCD8"/>
                 </a:solidFill>
@@ -1882,7 +1882,7 @@
             <a:pPr indent="0" marL="0">
               <a:buNone/>
             </a:pPr>
-            <a:endParaRPr lang="en-US" sz="3000" dirty="0"/>
+            <a:endParaRPr lang="en-US" sz="2800" dirty="0"/>
           </a:p>
         </p:txBody>
       </p:sp>
@@ -2773,7 +2773,7 @@
         <p:spPr>
           <a:xfrm>
             <a:off x="731520" y="640080"/>
-            <a:ext cx="6583680" cy="1188720"/>
+            <a:ext cx="6675120" cy="1188720"/>
           </a:xfrm>
           <a:prstGeom prst="rect">
             <a:avLst/>
@@ -2789,7 +2789,7 @@
               <a:buNone/>
             </a:pPr>
             <a:r>
-              <a:rPr lang="ko-KR" altLang="en-US" sz="4800" b="1" dirty="0">
+              <a:rPr lang="ko-KR" altLang="en-US" sz="4600" b="1" dirty="0">
                 <a:solidFill>
                   <a:srgbClr val="FFFFFF"/>
                 </a:solidFill>
@@ -2799,7 +2799,7 @@
               </a:rPr>
               <a:t>크기가 같은 분수</a:t>
             </a:r>
-            <a:endParaRPr lang="ko-KR" sz="4800" dirty="0"/>
+            <a:endParaRPr lang="ko-KR" sz="4600" dirty="0"/>
           </a:p>
         </p:txBody>
       </p:sp>
@@ -2814,7 +2814,7 @@
         <p:spPr>
           <a:xfrm>
             <a:off x="731520" y="1920240"/>
-            <a:ext cx="6583680" cy="1645920"/>
+            <a:ext cx="6675120" cy="1645920"/>
           </a:xfrm>
           <a:prstGeom prst="rect">
             <a:avLst/>
@@ -2830,7 +2830,7 @@
               <a:buNone/>
             </a:pPr>
             <a:r>
-              <a:rPr lang="ko-KR" altLang="en-US" sz="3000" dirty="0">
+              <a:rPr lang="ko-KR" altLang="en-US" sz="2800" dirty="0">
                 <a:solidFill>
                   <a:srgbClr val="C9DCD8"/>
                 </a:solidFill>
@@ -2840,7 +2840,7 @@
               </a:rPr>
               <a:t>모양이 다른 두 분수가 같은 양일 수 있을까?</a:t>
             </a:r>
-            <a:endParaRPr lang="ko-KR" sz="3000" dirty="0"/>
+            <a:endParaRPr lang="ko-KR" sz="2800" dirty="0"/>
           </a:p>
         </p:txBody>
       </p:sp>
@@ -2954,7 +2954,7 @@
         <p:spPr>
           <a:xfrm>
             <a:off x="8609076" y="1371600"/>
-            <a:ext cx="1200912" cy="1871472"/>
+            <a:ext cx="896112" cy="1871472"/>
           </a:xfrm>
           <a:prstGeom prst="rect">
             <a:avLst/>
@@ -2992,7 +2992,7 @@
         </p:nvSpPr>
         <p:spPr>
           <a:xfrm>
-            <a:off x="9919716" y="1371600"/>
+            <a:off x="9614916" y="1371600"/>
             <a:ext cx="909828" cy="899160"/>
           </a:xfrm>
           <a:prstGeom prst="rect">
@@ -3031,7 +3031,7 @@
         </p:nvSpPr>
         <p:spPr>
           <a:xfrm>
-            <a:off x="9956292" y="2307336"/>
+            <a:off x="9651492" y="2307336"/>
             <a:ext cx="836676" cy="0"/>
           </a:xfrm>
           <a:prstGeom prst="line">
@@ -3054,7 +3054,7 @@
         </p:nvSpPr>
         <p:spPr>
           <a:xfrm>
-            <a:off x="9919716" y="2343912"/>
+            <a:off x="9614916" y="2343912"/>
             <a:ext cx="909828" cy="899160"/>
           </a:xfrm>
           <a:prstGeom prst="rect">
@@ -3120,8 +3120,8 @@
         </p:nvSpPr>
         <p:spPr>
           <a:xfrm>
-            <a:off x="1005840" y="4041648"/>
-            <a:ext cx="10149840" cy="1883664"/>
+            <a:off x="1005840" y="4069080"/>
+            <a:ext cx="10149840" cy="1828800"/>
           </a:xfrm>
           <a:prstGeom prst="rect">
             <a:avLst/>
@@ -3295,8 +3295,8 @@
         </p:nvSpPr>
         <p:spPr>
           <a:xfrm>
-            <a:off x="822960" y="1435608"/>
-            <a:ext cx="10515600" cy="740664"/>
+            <a:off x="822960" y="1463040"/>
+            <a:ext cx="10515600" cy="685800"/>
           </a:xfrm>
           <a:prstGeom prst="rect">
             <a:avLst/>
@@ -3315,7 +3315,7 @@
               <a:buNone/>
             </a:pPr>
             <a:r>
-              <a:rPr lang="ko-KR" altLang="en-US" sz="2800" dirty="0">
+              <a:rPr lang="ko-KR" altLang="en-US" sz="2200" dirty="0">
                 <a:solidFill>
                   <a:srgbClr val="1F2937"/>
                 </a:solidFill>
@@ -3325,7 +3325,7 @@
               </a:rPr>
               <a:t>어떤 친구의 주장: “분자와 분모에 똑같이 1을 더해도 크기가 같은 분수가 돼요.”</a:t>
             </a:r>
-            <a:endParaRPr lang="ko-KR" sz="2800" dirty="0"/>
+            <a:endParaRPr lang="ko-KR" sz="2200" dirty="0"/>
           </a:p>
         </p:txBody>
       </p:sp>
@@ -3439,7 +3439,7 @@
         <p:spPr>
           <a:xfrm>
             <a:off x="1469136" y="3017520"/>
-            <a:ext cx="508000" cy="1032256"/>
+            <a:ext cx="654304" cy="1032256"/>
           </a:xfrm>
           <a:prstGeom prst="rect">
             <a:avLst/>
@@ -3477,7 +3477,7 @@
         </p:nvSpPr>
         <p:spPr>
           <a:xfrm>
-            <a:off x="2086864" y="3017520"/>
+            <a:off x="2233168" y="3017520"/>
             <a:ext cx="536448" cy="479552"/>
           </a:xfrm>
           <a:prstGeom prst="rect">
@@ -3516,7 +3516,7 @@
         </p:nvSpPr>
         <p:spPr>
           <a:xfrm>
-            <a:off x="2123440" y="3533648"/>
+            <a:off x="2269744" y="3533648"/>
             <a:ext cx="463296" cy="0"/>
           </a:xfrm>
           <a:prstGeom prst="line">
@@ -3539,7 +3539,7 @@
         </p:nvSpPr>
         <p:spPr>
           <a:xfrm>
-            <a:off x="2086864" y="3570224"/>
+            <a:off x="2233168" y="3570224"/>
             <a:ext cx="536448" cy="479552"/>
           </a:xfrm>
           <a:prstGeom prst="rect">
@@ -3579,7 +3579,7 @@
         <p:spPr>
           <a:xfrm>
             <a:off x="1091184" y="2871216"/>
-            <a:ext cx="1263904" cy="0"/>
+            <a:ext cx="1410208" cy="0"/>
           </a:xfrm>
           <a:prstGeom prst="line">
             <a:avLst/>
@@ -3603,7 +3603,7 @@
         <p:spPr>
           <a:xfrm>
             <a:off x="1091184" y="2503678"/>
-            <a:ext cx="1263904" cy="349250"/>
+            <a:ext cx="1410208" cy="349250"/>
           </a:xfrm>
           <a:prstGeom prst="rect">
             <a:avLst/>
@@ -3642,7 +3642,7 @@
         <p:spPr>
           <a:xfrm>
             <a:off x="1091184" y="4196080"/>
-            <a:ext cx="1263904" cy="0"/>
+            <a:ext cx="1410208" cy="0"/>
           </a:xfrm>
           <a:prstGeom prst="line">
             <a:avLst/>
@@ -3666,7 +3666,7 @@
         <p:spPr>
           <a:xfrm>
             <a:off x="1091184" y="4214368"/>
-            <a:ext cx="1263904" cy="349250"/>
+            <a:ext cx="1410208" cy="349250"/>
           </a:xfrm>
           <a:prstGeom prst="rect">
             <a:avLst/>
@@ -4135,8 +4135,8 @@
         </p:nvSpPr>
         <p:spPr>
           <a:xfrm>
-            <a:off x="822960" y="5093208"/>
-            <a:ext cx="10515600" cy="832104"/>
+            <a:off x="822960" y="5120640"/>
+            <a:ext cx="10515600" cy="777240"/>
           </a:xfrm>
           <a:prstGeom prst="rect">
             <a:avLst/>
@@ -4432,7 +4432,7 @@
         <p:spPr>
           <a:xfrm>
             <a:off x="1575816" y="2240280"/>
-            <a:ext cx="570992" cy="1272032"/>
+            <a:ext cx="469392" cy="1272032"/>
           </a:xfrm>
           <a:prstGeom prst="rect">
             <a:avLst/>
@@ -4470,7 +4470,7 @@
         </p:nvSpPr>
         <p:spPr>
           <a:xfrm>
-            <a:off x="2356307" y="2318207"/>
+            <a:off x="2254707" y="2318207"/>
             <a:ext cx="443586" cy="443586"/>
           </a:xfrm>
           <a:prstGeom prst="rect">
@@ -4495,7 +4495,7 @@
         </p:nvSpPr>
         <p:spPr>
           <a:xfrm>
-            <a:off x="2293112" y="2876296"/>
+            <a:off x="2191512" y="2876296"/>
             <a:ext cx="569976" cy="0"/>
           </a:xfrm>
           <a:prstGeom prst="line">
@@ -4518,7 +4518,7 @@
         </p:nvSpPr>
         <p:spPr>
           <a:xfrm>
-            <a:off x="2356307" y="2990799"/>
+            <a:off x="2254707" y="2990799"/>
             <a:ext cx="443586" cy="443586"/>
           </a:xfrm>
           <a:prstGeom prst="rect">
@@ -4543,8 +4543,8 @@
         </p:nvSpPr>
         <p:spPr>
           <a:xfrm>
-            <a:off x="3009392" y="2240280"/>
-            <a:ext cx="570992" cy="1272032"/>
+            <a:off x="2907792" y="2240280"/>
+            <a:ext cx="469392" cy="1272032"/>
           </a:xfrm>
           <a:prstGeom prst="rect">
             <a:avLst/>
@@ -4582,7 +4582,7 @@
         </p:nvSpPr>
         <p:spPr>
           <a:xfrm>
-            <a:off x="3789883" y="2318207"/>
+            <a:off x="3586683" y="2318207"/>
             <a:ext cx="443586" cy="443586"/>
           </a:xfrm>
           <a:prstGeom prst="rect">
@@ -4607,7 +4607,7 @@
         </p:nvSpPr>
         <p:spPr>
           <a:xfrm>
-            <a:off x="3726688" y="2876296"/>
+            <a:off x="3523488" y="2876296"/>
             <a:ext cx="569976" cy="0"/>
           </a:xfrm>
           <a:prstGeom prst="line">
@@ -4630,7 +4630,7 @@
         </p:nvSpPr>
         <p:spPr>
           <a:xfrm>
-            <a:off x="3789883" y="2990799"/>
+            <a:off x="3586683" y="2990799"/>
             <a:ext cx="443586" cy="443586"/>
           </a:xfrm>
           <a:prstGeom prst="rect">
@@ -4809,8 +4809,8 @@
         </p:nvSpPr>
         <p:spPr>
           <a:xfrm>
-            <a:off x="822960" y="4361688"/>
-            <a:ext cx="10515600" cy="832104"/>
+            <a:off x="822960" y="4389120"/>
+            <a:ext cx="10515600" cy="777240"/>
           </a:xfrm>
           <a:prstGeom prst="rect">
             <a:avLst/>
@@ -6017,8 +6017,8 @@
         </p:nvSpPr>
         <p:spPr>
           <a:xfrm>
-            <a:off x="1005840" y="1527048"/>
-            <a:ext cx="10149840" cy="969264"/>
+            <a:off x="1005840" y="1554480"/>
+            <a:ext cx="10149840" cy="914400"/>
           </a:xfrm>
           <a:prstGeom prst="rect">
             <a:avLst/>
@@ -6193,7 +6193,7 @@
         <p:spPr>
           <a:xfrm>
             <a:off x="822960" y="4206240"/>
-            <a:ext cx="460756" cy="852424"/>
+            <a:ext cx="579628" cy="852424"/>
           </a:xfrm>
           <a:prstGeom prst="rect">
             <a:avLst/>
@@ -6231,7 +6231,7 @@
         </p:nvSpPr>
         <p:spPr>
           <a:xfrm>
-            <a:off x="1393444" y="4206240"/>
+            <a:off x="1512316" y="4206240"/>
             <a:ext cx="456438" cy="389636"/>
           </a:xfrm>
           <a:prstGeom prst="rect">
@@ -6270,7 +6270,7 @@
         </p:nvSpPr>
         <p:spPr>
           <a:xfrm>
-            <a:off x="1430020" y="4632452"/>
+            <a:off x="1548892" y="4632452"/>
             <a:ext cx="383286" cy="0"/>
           </a:xfrm>
           <a:prstGeom prst="line">
@@ -6293,7 +6293,7 @@
         </p:nvSpPr>
         <p:spPr>
           <a:xfrm>
-            <a:off x="1393444" y="4669028"/>
+            <a:off x="1512316" y="4669028"/>
             <a:ext cx="456438" cy="389636"/>
           </a:xfrm>
           <a:prstGeom prst="rect">
@@ -6332,8 +6332,8 @@
         </p:nvSpPr>
         <p:spPr>
           <a:xfrm>
-            <a:off x="1959610" y="4206240"/>
-            <a:ext cx="460756" cy="852424"/>
+            <a:off x="2078482" y="4206240"/>
+            <a:ext cx="394716" cy="852424"/>
           </a:xfrm>
           <a:prstGeom prst="rect">
             <a:avLst/>
@@ -6371,7 +6371,7 @@
         </p:nvSpPr>
         <p:spPr>
           <a:xfrm>
-            <a:off x="2614148" y="4256893"/>
+            <a:off x="2666980" y="4256893"/>
             <a:ext cx="288331" cy="288331"/>
           </a:xfrm>
           <a:prstGeom prst="rect">
@@ -6396,7 +6396,7 @@
         </p:nvSpPr>
         <p:spPr>
           <a:xfrm>
-            <a:off x="2566670" y="4632452"/>
+            <a:off x="2619502" y="4632452"/>
             <a:ext cx="383286" cy="0"/>
           </a:xfrm>
           <a:prstGeom prst="line">
@@ -6419,7 +6419,7 @@
         </p:nvSpPr>
         <p:spPr>
           <a:xfrm>
-            <a:off x="2530094" y="4669028"/>
+            <a:off x="2582926" y="4669028"/>
             <a:ext cx="456438" cy="389636"/>
           </a:xfrm>
           <a:prstGeom prst="rect">
@@ -6459,7 +6459,7 @@
         <p:spPr>
           <a:xfrm>
             <a:off x="4206240" y="4206240"/>
-            <a:ext cx="460756" cy="852424"/>
+            <a:ext cx="579628" cy="852424"/>
           </a:xfrm>
           <a:prstGeom prst="rect">
             <a:avLst/>
@@ -6497,7 +6497,7 @@
         </p:nvSpPr>
         <p:spPr>
           <a:xfrm>
-            <a:off x="4776724" y="4206240"/>
+            <a:off x="4895596" y="4206240"/>
             <a:ext cx="547624" cy="389636"/>
           </a:xfrm>
           <a:prstGeom prst="rect">
@@ -6536,7 +6536,7 @@
         </p:nvSpPr>
         <p:spPr>
           <a:xfrm>
-            <a:off x="4813300" y="4632452"/>
+            <a:off x="4932172" y="4632452"/>
             <a:ext cx="474472" cy="0"/>
           </a:xfrm>
           <a:prstGeom prst="line">
@@ -6559,7 +6559,7 @@
         </p:nvSpPr>
         <p:spPr>
           <a:xfrm>
-            <a:off x="4776724" y="4669028"/>
+            <a:off x="4895596" y="4669028"/>
             <a:ext cx="547624" cy="389636"/>
           </a:xfrm>
           <a:prstGeom prst="rect">
@@ -6598,8 +6598,8 @@
         </p:nvSpPr>
         <p:spPr>
           <a:xfrm>
-            <a:off x="5434076" y="4206240"/>
-            <a:ext cx="460756" cy="852424"/>
+            <a:off x="5552948" y="4206240"/>
+            <a:ext cx="394716" cy="852424"/>
           </a:xfrm>
           <a:prstGeom prst="rect">
             <a:avLst/>
@@ -6637,7 +6637,7 @@
         </p:nvSpPr>
         <p:spPr>
           <a:xfrm>
-            <a:off x="6004560" y="4206240"/>
+            <a:off x="6057392" y="4206240"/>
             <a:ext cx="456438" cy="389636"/>
           </a:xfrm>
           <a:prstGeom prst="rect">
@@ -6676,7 +6676,7 @@
         </p:nvSpPr>
         <p:spPr>
           <a:xfrm>
-            <a:off x="6041136" y="4632452"/>
+            <a:off x="6093968" y="4632452"/>
             <a:ext cx="383286" cy="0"/>
           </a:xfrm>
           <a:prstGeom prst="line">
@@ -6699,7 +6699,7 @@
         </p:nvSpPr>
         <p:spPr>
           <a:xfrm>
-            <a:off x="6088614" y="4719681"/>
+            <a:off x="6141446" y="4719681"/>
             <a:ext cx="288331" cy="288331"/>
           </a:xfrm>
           <a:prstGeom prst="rect">
@@ -7411,7 +7411,7 @@
         <p:spPr>
           <a:xfrm>
             <a:off x="4572000" y="4343400"/>
-            <a:ext cx="460756" cy="852424"/>
+            <a:ext cx="579628" cy="852424"/>
           </a:xfrm>
           <a:prstGeom prst="rect">
             <a:avLst/>
@@ -7449,7 +7449,7 @@
         </p:nvSpPr>
         <p:spPr>
           <a:xfrm>
-            <a:off x="5226538" y="4394053"/>
+            <a:off x="5345410" y="4394053"/>
             <a:ext cx="288331" cy="288331"/>
           </a:xfrm>
           <a:prstGeom prst="rect">
@@ -7474,7 +7474,7 @@
         </p:nvSpPr>
         <p:spPr>
           <a:xfrm>
-            <a:off x="5179060" y="4769612"/>
+            <a:off x="5297932" y="4769612"/>
             <a:ext cx="383286" cy="0"/>
           </a:xfrm>
           <a:prstGeom prst="line">
@@ -7497,7 +7497,7 @@
         </p:nvSpPr>
         <p:spPr>
           <a:xfrm>
-            <a:off x="5226538" y="4856841"/>
+            <a:off x="5345410" y="4856841"/>
             <a:ext cx="288331" cy="288331"/>
           </a:xfrm>
           <a:prstGeom prst="rect">
@@ -7675,7 +7675,7 @@
         <p:spPr>
           <a:xfrm>
             <a:off x="10424160" y="4343400"/>
-            <a:ext cx="460756" cy="852424"/>
+            <a:ext cx="579628" cy="852424"/>
           </a:xfrm>
           <a:prstGeom prst="rect">
             <a:avLst/>
@@ -7713,7 +7713,7 @@
         </p:nvSpPr>
         <p:spPr>
           <a:xfrm>
-            <a:off x="11078698" y="4394053"/>
+            <a:off x="11197570" y="4394053"/>
             <a:ext cx="288331" cy="288331"/>
           </a:xfrm>
           <a:prstGeom prst="rect">
@@ -7738,7 +7738,7 @@
         </p:nvSpPr>
         <p:spPr>
           <a:xfrm>
-            <a:off x="11031220" y="4769612"/>
+            <a:off x="11150092" y="4769612"/>
             <a:ext cx="383286" cy="0"/>
           </a:xfrm>
           <a:prstGeom prst="line">
@@ -7761,7 +7761,7 @@
         </p:nvSpPr>
         <p:spPr>
           <a:xfrm>
-            <a:off x="11078698" y="4856841"/>
+            <a:off x="11197570" y="4856841"/>
             <a:ext cx="288331" cy="288331"/>
           </a:xfrm>
           <a:prstGeom prst="rect">
@@ -8612,8 +8612,8 @@
         </p:nvSpPr>
         <p:spPr>
           <a:xfrm>
-            <a:off x="822960" y="4864608"/>
-            <a:ext cx="10515600" cy="1014984"/>
+            <a:off x="822960" y="4892040"/>
+            <a:ext cx="10515600" cy="960120"/>
           </a:xfrm>
           <a:prstGeom prst="rect">
             <a:avLst/>
@@ -9210,8 +9210,8 @@
         </p:nvSpPr>
         <p:spPr>
           <a:xfrm>
-            <a:off x="822960" y="5047488"/>
-            <a:ext cx="10515600" cy="923544"/>
+            <a:off x="822960" y="5074920"/>
+            <a:ext cx="10515600" cy="868680"/>
           </a:xfrm>
           <a:prstGeom prst="rect">
             <a:avLst/>
@@ -10723,8 +10723,8 @@
         </p:nvSpPr>
         <p:spPr>
           <a:xfrm>
-            <a:off x="822960" y="4270248"/>
-            <a:ext cx="2953512" cy="1563624"/>
+            <a:off x="822960" y="4297680"/>
+            <a:ext cx="2953512" cy="1508760"/>
           </a:xfrm>
           <a:prstGeom prst="rect">
             <a:avLst/>
@@ -10812,8 +10812,8 @@
         </p:nvSpPr>
         <p:spPr>
           <a:xfrm>
-            <a:off x="4599432" y="4270248"/>
-            <a:ext cx="2953512" cy="1563624"/>
+            <a:off x="4599432" y="4297680"/>
+            <a:ext cx="2953512" cy="1508760"/>
           </a:xfrm>
           <a:prstGeom prst="rect">
             <a:avLst/>
@@ -10901,8 +10901,8 @@
         </p:nvSpPr>
         <p:spPr>
           <a:xfrm>
-            <a:off x="8375904" y="4270248"/>
-            <a:ext cx="2962656" cy="1563624"/>
+            <a:off x="8375904" y="4297680"/>
+            <a:ext cx="2962656" cy="1508760"/>
           </a:xfrm>
           <a:prstGeom prst="rect">
             <a:avLst/>
@@ -11886,7 +11886,7 @@
         <p:spPr>
           <a:xfrm>
             <a:off x="1495806" y="4663440"/>
-            <a:ext cx="523748" cy="1092200"/>
+            <a:ext cx="437388" cy="1092200"/>
           </a:xfrm>
           <a:prstGeom prst="rect">
             <a:avLst/>
@@ -11924,7 +11924,7 @@
         </p:nvSpPr>
         <p:spPr>
           <a:xfrm>
-            <a:off x="2129282" y="4663440"/>
+            <a:off x="2042922" y="4663440"/>
             <a:ext cx="563118" cy="509524"/>
           </a:xfrm>
           <a:prstGeom prst="rect">
@@ -11963,7 +11963,7 @@
         </p:nvSpPr>
         <p:spPr>
           <a:xfrm>
-            <a:off x="2165858" y="5209540"/>
+            <a:off x="2079498" y="5209540"/>
             <a:ext cx="489966" cy="0"/>
           </a:xfrm>
           <a:prstGeom prst="line">
@@ -11986,7 +11986,7 @@
         </p:nvSpPr>
         <p:spPr>
           <a:xfrm>
-            <a:off x="2129282" y="5246116"/>
+            <a:off x="2042922" y="5246116"/>
             <a:ext cx="563118" cy="509524"/>
           </a:xfrm>
           <a:prstGeom prst="rect">
@@ -12025,8 +12025,8 @@
         </p:nvSpPr>
         <p:spPr>
           <a:xfrm>
-            <a:off x="2802128" y="4663440"/>
-            <a:ext cx="523748" cy="1092200"/>
+            <a:off x="2715768" y="4663440"/>
+            <a:ext cx="437388" cy="1092200"/>
           </a:xfrm>
           <a:prstGeom prst="rect">
             <a:avLst/>
@@ -12064,7 +12064,7 @@
         </p:nvSpPr>
         <p:spPr>
           <a:xfrm>
-            <a:off x="3435604" y="4663440"/>
+            <a:off x="3262884" y="4663440"/>
             <a:ext cx="563118" cy="509524"/>
           </a:xfrm>
           <a:prstGeom prst="rect">
@@ -12103,7 +12103,7 @@
         </p:nvSpPr>
         <p:spPr>
           <a:xfrm>
-            <a:off x="3472180" y="5209540"/>
+            <a:off x="3299460" y="5209540"/>
             <a:ext cx="489966" cy="0"/>
           </a:xfrm>
           <a:prstGeom prst="line">
@@ -12126,7 +12126,7 @@
         </p:nvSpPr>
         <p:spPr>
           <a:xfrm>
-            <a:off x="3435604" y="5246116"/>
+            <a:off x="3262884" y="5246116"/>
             <a:ext cx="563118" cy="509524"/>
           </a:xfrm>
           <a:prstGeom prst="rect">
@@ -12192,8 +12192,8 @@
         </p:nvSpPr>
         <p:spPr>
           <a:xfrm>
-            <a:off x="5760720" y="4773168"/>
-            <a:ext cx="5577840" cy="1152144"/>
+            <a:off x="5760720" y="4800600"/>
+            <a:ext cx="5577840" cy="1097280"/>
           </a:xfrm>
           <a:prstGeom prst="rect">
             <a:avLst/>
@@ -12693,7 +12693,7 @@
         <p:spPr>
           <a:xfrm>
             <a:off x="7275576" y="1828800"/>
-            <a:ext cx="508000" cy="1032256"/>
+            <a:ext cx="426720" cy="1032256"/>
           </a:xfrm>
           <a:prstGeom prst="rect">
             <a:avLst/>
@@ -12731,7 +12731,7 @@
         </p:nvSpPr>
         <p:spPr>
           <a:xfrm>
-            <a:off x="7893304" y="1828800"/>
+            <a:off x="7812024" y="1828800"/>
             <a:ext cx="536448" cy="479552"/>
           </a:xfrm>
           <a:prstGeom prst="rect">
@@ -12770,7 +12770,7 @@
         </p:nvSpPr>
         <p:spPr>
           <a:xfrm>
-            <a:off x="7929880" y="2344928"/>
+            <a:off x="7848600" y="2344928"/>
             <a:ext cx="463296" cy="0"/>
           </a:xfrm>
           <a:prstGeom prst="line">
@@ -12793,7 +12793,7 @@
         </p:nvSpPr>
         <p:spPr>
           <a:xfrm>
-            <a:off x="7893304" y="2381504"/>
+            <a:off x="7812024" y="2381504"/>
             <a:ext cx="536448" cy="479552"/>
           </a:xfrm>
           <a:prstGeom prst="rect">
@@ -12833,7 +12833,7 @@
         <p:spPr>
           <a:xfrm>
             <a:off x="6897624" y="1682496"/>
-            <a:ext cx="1263904" cy="0"/>
+            <a:ext cx="1182624" cy="0"/>
           </a:xfrm>
           <a:prstGeom prst="line">
             <a:avLst/>
@@ -12857,7 +12857,7 @@
         <p:spPr>
           <a:xfrm>
             <a:off x="6897624" y="1314958"/>
-            <a:ext cx="1263904" cy="349250"/>
+            <a:ext cx="1182624" cy="349250"/>
           </a:xfrm>
           <a:prstGeom prst="rect">
             <a:avLst/>
@@ -12896,7 +12896,7 @@
         <p:spPr>
           <a:xfrm>
             <a:off x="6897624" y="3007360"/>
-            <a:ext cx="1263904" cy="0"/>
+            <a:ext cx="1182624" cy="0"/>
           </a:xfrm>
           <a:prstGeom prst="line">
             <a:avLst/>
@@ -12920,7 +12920,7 @@
         <p:spPr>
           <a:xfrm>
             <a:off x="6897624" y="3025648"/>
-            <a:ext cx="1263904" cy="349250"/>
+            <a:ext cx="1182624" cy="349250"/>
           </a:xfrm>
           <a:prstGeom prst="rect">
             <a:avLst/>
@@ -13060,7 +13060,7 @@
         <p:spPr>
           <a:xfrm>
             <a:off x="9973056" y="1828800"/>
-            <a:ext cx="508000" cy="1032256"/>
+            <a:ext cx="426720" cy="1032256"/>
           </a:xfrm>
           <a:prstGeom prst="rect">
             <a:avLst/>
@@ -13098,7 +13098,7 @@
         </p:nvSpPr>
         <p:spPr>
           <a:xfrm>
-            <a:off x="10590784" y="1828800"/>
+            <a:off x="10509504" y="1828800"/>
             <a:ext cx="536448" cy="479552"/>
           </a:xfrm>
           <a:prstGeom prst="rect">
@@ -13137,7 +13137,7 @@
         </p:nvSpPr>
         <p:spPr>
           <a:xfrm>
-            <a:off x="10627360" y="2344928"/>
+            <a:off x="10546080" y="2344928"/>
             <a:ext cx="463296" cy="0"/>
           </a:xfrm>
           <a:prstGeom prst="line">
@@ -13160,7 +13160,7 @@
         </p:nvSpPr>
         <p:spPr>
           <a:xfrm>
-            <a:off x="10590784" y="2381504"/>
+            <a:off x="10509504" y="2381504"/>
             <a:ext cx="536448" cy="479552"/>
           </a:xfrm>
           <a:prstGeom prst="rect">
@@ -13200,7 +13200,7 @@
         <p:spPr>
           <a:xfrm>
             <a:off x="9595104" y="1682496"/>
-            <a:ext cx="1263904" cy="0"/>
+            <a:ext cx="1182624" cy="0"/>
           </a:xfrm>
           <a:prstGeom prst="line">
             <a:avLst/>
@@ -13224,7 +13224,7 @@
         <p:spPr>
           <a:xfrm>
             <a:off x="9595104" y="1314958"/>
-            <a:ext cx="1263904" cy="349250"/>
+            <a:ext cx="1182624" cy="349250"/>
           </a:xfrm>
           <a:prstGeom prst="rect">
             <a:avLst/>
@@ -13263,7 +13263,7 @@
         <p:spPr>
           <a:xfrm>
             <a:off x="9595104" y="3007360"/>
-            <a:ext cx="1263904" cy="0"/>
+            <a:ext cx="1182624" cy="0"/>
           </a:xfrm>
           <a:prstGeom prst="line">
             <a:avLst/>
@@ -13287,7 +13287,7 @@
         <p:spPr>
           <a:xfrm>
             <a:off x="9595104" y="3025648"/>
-            <a:ext cx="1263904" cy="349250"/>
+            <a:ext cx="1182624" cy="349250"/>
           </a:xfrm>
           <a:prstGeom prst="rect">
             <a:avLst/>
@@ -13352,8 +13352,8 @@
         </p:nvSpPr>
         <p:spPr>
           <a:xfrm>
-            <a:off x="822960" y="4361688"/>
-            <a:ext cx="10515600" cy="832104"/>
+            <a:off x="822960" y="4389120"/>
+            <a:ext cx="10515600" cy="777240"/>
           </a:xfrm>
           <a:prstGeom prst="rect">
             <a:avLst/>
@@ -14042,7 +14042,7 @@
         <p:spPr>
           <a:xfrm>
             <a:off x="8327136" y="1828800"/>
-            <a:ext cx="508000" cy="1032256"/>
+            <a:ext cx="426720" cy="1032256"/>
           </a:xfrm>
           <a:prstGeom prst="rect">
             <a:avLst/>
@@ -14080,7 +14080,7 @@
         </p:nvSpPr>
         <p:spPr>
           <a:xfrm>
-            <a:off x="8944864" y="1828800"/>
+            <a:off x="8863584" y="1828800"/>
             <a:ext cx="536448" cy="479552"/>
           </a:xfrm>
           <a:prstGeom prst="rect">
@@ -14119,7 +14119,7 @@
         </p:nvSpPr>
         <p:spPr>
           <a:xfrm>
-            <a:off x="8981440" y="2344928"/>
+            <a:off x="8900160" y="2344928"/>
             <a:ext cx="463296" cy="0"/>
           </a:xfrm>
           <a:prstGeom prst="line">
@@ -14142,7 +14142,7 @@
         </p:nvSpPr>
         <p:spPr>
           <a:xfrm>
-            <a:off x="8944864" y="2381504"/>
+            <a:off x="8863584" y="2381504"/>
             <a:ext cx="536448" cy="479552"/>
           </a:xfrm>
           <a:prstGeom prst="rect">
@@ -14182,7 +14182,7 @@
         <p:spPr>
           <a:xfrm>
             <a:off x="7949184" y="1682496"/>
-            <a:ext cx="1263904" cy="0"/>
+            <a:ext cx="1182624" cy="0"/>
           </a:xfrm>
           <a:prstGeom prst="line">
             <a:avLst/>
@@ -14206,7 +14206,7 @@
         <p:spPr>
           <a:xfrm>
             <a:off x="7949184" y="1314958"/>
-            <a:ext cx="1263904" cy="349250"/>
+            <a:ext cx="1182624" cy="349250"/>
           </a:xfrm>
           <a:prstGeom prst="rect">
             <a:avLst/>
@@ -14245,7 +14245,7 @@
         <p:spPr>
           <a:xfrm>
             <a:off x="7949184" y="3007360"/>
-            <a:ext cx="1263904" cy="0"/>
+            <a:ext cx="1182624" cy="0"/>
           </a:xfrm>
           <a:prstGeom prst="line">
             <a:avLst/>
@@ -14269,7 +14269,7 @@
         <p:spPr>
           <a:xfrm>
             <a:off x="7949184" y="3025648"/>
-            <a:ext cx="1263904" cy="349250"/>
+            <a:ext cx="1182624" cy="349250"/>
           </a:xfrm>
           <a:prstGeom prst="rect">
             <a:avLst/>
@@ -14334,8 +14334,8 @@
         </p:nvSpPr>
         <p:spPr>
           <a:xfrm>
-            <a:off x="822960" y="4361688"/>
-            <a:ext cx="10515600" cy="832104"/>
+            <a:off x="822960" y="4389120"/>
+            <a:ext cx="10515600" cy="777240"/>
           </a:xfrm>
           <a:prstGeom prst="rect">
             <a:avLst/>
@@ -14686,7 +14686,7 @@
         <p:spPr>
           <a:xfrm>
             <a:off x="2082546" y="1371600"/>
-            <a:ext cx="492252" cy="972312"/>
+            <a:ext cx="416052" cy="972312"/>
           </a:xfrm>
           <a:prstGeom prst="rect">
             <a:avLst/>
@@ -14724,7 +14724,7 @@
         </p:nvSpPr>
         <p:spPr>
           <a:xfrm>
-            <a:off x="2773070" y="1430045"/>
+            <a:off x="2696870" y="1430045"/>
             <a:ext cx="332689" cy="332689"/>
           </a:xfrm>
           <a:prstGeom prst="rect">
@@ -14749,7 +14749,7 @@
         </p:nvSpPr>
         <p:spPr>
           <a:xfrm>
-            <a:off x="2721102" y="1857756"/>
+            <a:off x="2644902" y="1857756"/>
             <a:ext cx="436626" cy="0"/>
           </a:xfrm>
           <a:prstGeom prst="line">
@@ -14772,7 +14772,7 @@
         </p:nvSpPr>
         <p:spPr>
           <a:xfrm>
-            <a:off x="2684526" y="1894332"/>
+            <a:off x="2608326" y="1894332"/>
             <a:ext cx="509778" cy="449580"/>
           </a:xfrm>
           <a:prstGeom prst="rect">
@@ -14960,7 +14960,7 @@
         <p:spPr>
           <a:xfrm>
             <a:off x="2082546" y="2788920"/>
-            <a:ext cx="492252" cy="972312"/>
+            <a:ext cx="416052" cy="972312"/>
           </a:xfrm>
           <a:prstGeom prst="rect">
             <a:avLst/>
@@ -14998,7 +14998,7 @@
         </p:nvSpPr>
         <p:spPr>
           <a:xfrm>
-            <a:off x="2684526" y="2788920"/>
+            <a:off x="2608326" y="2788920"/>
             <a:ext cx="509778" cy="449580"/>
           </a:xfrm>
           <a:prstGeom prst="rect">
@@ -15037,7 +15037,7 @@
         </p:nvSpPr>
         <p:spPr>
           <a:xfrm>
-            <a:off x="2721102" y="3275076"/>
+            <a:off x="2644902" y="3275076"/>
             <a:ext cx="436626" cy="0"/>
           </a:xfrm>
           <a:prstGeom prst="line">
@@ -15060,7 +15060,7 @@
         </p:nvSpPr>
         <p:spPr>
           <a:xfrm>
-            <a:off x="2773070" y="3370097"/>
+            <a:off x="2696870" y="3370097"/>
             <a:ext cx="332689" cy="332689"/>
           </a:xfrm>
           <a:prstGeom prst="rect">
@@ -15234,7 +15234,7 @@
         <p:spPr>
           <a:xfrm>
             <a:off x="2082546" y="4206240"/>
-            <a:ext cx="492252" cy="972312"/>
+            <a:ext cx="416052" cy="972312"/>
           </a:xfrm>
           <a:prstGeom prst="rect">
             <a:avLst/>
@@ -15272,7 +15272,7 @@
         </p:nvSpPr>
         <p:spPr>
           <a:xfrm>
-            <a:off x="2684526" y="4206240"/>
+            <a:off x="2608326" y="4206240"/>
             <a:ext cx="509778" cy="449580"/>
           </a:xfrm>
           <a:prstGeom prst="rect">
@@ -15311,7 +15311,7 @@
         </p:nvSpPr>
         <p:spPr>
           <a:xfrm>
-            <a:off x="2721102" y="4692396"/>
+            <a:off x="2644902" y="4692396"/>
             <a:ext cx="436626" cy="0"/>
           </a:xfrm>
           <a:prstGeom prst="line">
@@ -15334,7 +15334,7 @@
         </p:nvSpPr>
         <p:spPr>
           <a:xfrm>
-            <a:off x="2773070" y="4787417"/>
+            <a:off x="2696870" y="4787417"/>
             <a:ext cx="332689" cy="332689"/>
           </a:xfrm>
           <a:prstGeom prst="rect">
@@ -15386,8 +15386,8 @@
         </p:nvSpPr>
         <p:spPr>
           <a:xfrm>
-            <a:off x="5760720" y="1554480"/>
-            <a:ext cx="5577840" cy="640080"/>
+            <a:off x="5760720" y="1508760"/>
+            <a:ext cx="5577840" cy="2971800"/>
           </a:xfrm>
           <a:prstGeom prst="rect">
             <a:avLst/>

--- a/dist/초5/수학/분수의성질/초5_수학_분수의성질_01_크기가같은분수_학생용.pptx
+++ b/dist/초5/수학/분수의성질/초5_수학_분수의성질_01_크기가같은분수_학생용.pptx
@@ -120,13 +120,13 @@
   <p:extLst>
     <p:ext uri="{521415D9-36F7-43E2-AB2F-B90AF26B5E84}">
       <p14:sectionLst xmlns:p14="http://schemas.microsoft.com/office/powerpoint/2010/main">
-        <p14:section name="도입" id="{7777719f-18f0-1207-f0b4-2ce6a8312d14}">
+        <p14:section name="도입" id="{61ed48ed-1149-321b-1ab3-8b79f78e7f4a}">
           <p14:sldIdLst>
             <p14:sldId id="256"/>
             <p14:sldId id="257"/>
           </p14:sldIdLst>
         </p14:section>
-        <p14:section name="개념" id="{9c88c62c-bd03-12d7-7b2d-20d151d33074}">
+        <p14:section name="개념" id="{1661abe4-548d-75c2-ab3b-717122962a73}">
           <p14:sldIdLst>
             <p14:sldId id="258"/>
             <p14:sldId id="259"/>
@@ -136,24 +136,24 @@
             <p14:sldId id="263"/>
           </p14:sldIdLst>
         </p14:section>
-        <p14:section name="연습" id="{f6a39105-4348-7930-8e75-9de82079e9dc}">
+        <p14:section name="연습" id="{e7c9ba66-587d-c358-6706-b5f21ef2f1c9}">
           <p14:sldIdLst>
             <p14:sldId id="264"/>
             <p14:sldId id="265"/>
           </p14:sldIdLst>
         </p14:section>
-        <p14:section name="확인" id="{825eb701-9230-884b-af7b-d3a6591633ed}">
+        <p14:section name="확인" id="{2dc3a787-fed7-8e18-f29b-9889449f1bd4}">
           <p14:sldIdLst>
             <p14:sldId id="266"/>
             <p14:sldId id="267"/>
           </p14:sldIdLst>
         </p14:section>
-        <p14:section name="정리" id="{e877f9a3-10e1-a81f-eefd-2e9b2e9cad4f}">
+        <p14:section name="정리" id="{4e5ad4d1-aa67-95ba-403a-7081d8d4ce19}">
           <p14:sldIdLst>
             <p14:sldId id="268"/>
           </p14:sldIdLst>
         </p14:section>
-        <p14:section name="보충" id="{e72f7041-cec1-a839-5d4e-70e7f0555ad6}">
+        <p14:section name="보충" id="{834c9711-ec5c-eb97-900f-24f8fc6525db}">
           <p14:sldIdLst>
             <p14:sldId id="269"/>
           </p14:sldIdLst>
@@ -2785,7 +2785,7 @@
           <a:bodyPr wrap="square" lIns="0" tIns="0" rIns="0" bIns="0" rtlCol="0" anchor="ctr"/>
           <a:lstStyle/>
           <a:p>
-            <a:pPr algn="l" indent="0" marL="0">
+            <a:pPr eaLnBrk="0" algn="l" indent="0" marL="0">
               <a:buNone/>
             </a:pPr>
             <a:r>
@@ -2826,7 +2826,7 @@
           <a:bodyPr wrap="square" lIns="0" tIns="0" rIns="0" bIns="0" rtlCol="0" anchor="t"/>
           <a:lstStyle/>
           <a:p>
-            <a:pPr indent="0" marL="0">
+            <a:pPr eaLnBrk="0" indent="0" marL="0">
               <a:buNone/>
             </a:pPr>
             <a:r>
@@ -2865,7 +2865,7 @@
           <a:bodyPr wrap="square" lIns="0" tIns="0" rIns="0" bIns="0" rtlCol="0" anchor="ctr"/>
           <a:lstStyle/>
           <a:p>
-            <a:pPr algn="ctr" indent="0" marL="0">
+            <a:pPr eaLnBrk="0" algn="ctr" indent="0" marL="0">
               <a:buNone/>
             </a:pPr>
             <a:r>
@@ -2927,7 +2927,7 @@
           <a:bodyPr wrap="square" lIns="0" tIns="0" rIns="0" bIns="0" rtlCol="0" anchor="ctr"/>
           <a:lstStyle/>
           <a:p>
-            <a:pPr algn="ctr" indent="0" marL="0">
+            <a:pPr eaLnBrk="0" algn="ctr" indent="0" marL="0">
               <a:buNone/>
             </a:pPr>
             <a:r>
@@ -2966,7 +2966,7 @@
           <a:bodyPr wrap="square" lIns="0" tIns="0" rIns="0" bIns="0" rtlCol="0" anchor="ctr"/>
           <a:lstStyle/>
           <a:p>
-            <a:pPr algn="ctr" indent="0" marL="0">
+            <a:pPr eaLnBrk="0" algn="ctr" indent="0" marL="0">
               <a:buNone/>
             </a:pPr>
             <a:r>
@@ -3005,7 +3005,7 @@
           <a:bodyPr wrap="square" lIns="0" tIns="0" rIns="0" bIns="0" rtlCol="0" anchor="ctr"/>
           <a:lstStyle/>
           <a:p>
-            <a:pPr algn="ctr" indent="0" marL="0">
+            <a:pPr eaLnBrk="0" algn="ctr" indent="0" marL="0">
               <a:buNone/>
             </a:pPr>
             <a:r>
@@ -3067,7 +3067,7 @@
           <a:bodyPr wrap="square" lIns="0" tIns="0" rIns="0" bIns="0" rtlCol="0" anchor="ctr"/>
           <a:lstStyle/>
           <a:p>
-            <a:pPr algn="ctr" indent="0" marL="0">
+            <a:pPr eaLnBrk="0" algn="ctr" indent="0" marL="0">
               <a:buNone/>
             </a:pPr>
             <a:r>
@@ -3133,7 +3133,7 @@
           <a:bodyPr wrap="square" lIns="0" tIns="0" rIns="0" bIns="0" rtlCol="0" anchor="ctr"/>
           <a:lstStyle/>
           <a:p>
-            <a:pPr indent="0" marL="0">
+            <a:pPr eaLnBrk="0" indent="0" marL="0">
               <a:spcAft>
                 <a:spcPts val="600"/>
               </a:spcAft>
@@ -3153,7 +3153,7 @@
             <a:endParaRPr lang="ko-KR" sz="2800" dirty="0"/>
           </a:p>
           <a:p>
-            <a:pPr indent="0" marL="0">
+            <a:pPr eaLnBrk="0" indent="0" marL="0">
               <a:spcAft>
                 <a:spcPts val="600"/>
               </a:spcAft>
@@ -3173,7 +3173,7 @@
             <a:endParaRPr lang="ko-KR" sz="2800" dirty="0"/>
           </a:p>
           <a:p>
-            <a:pPr indent="0" marL="0">
+            <a:pPr eaLnBrk="0" indent="0" marL="0">
               <a:spcAft>
                 <a:spcPts val="600"/>
               </a:spcAft>
@@ -3242,7 +3242,7 @@
           <a:bodyPr wrap="square" lIns="0" tIns="0" rIns="0" bIns="0" rtlCol="0" anchor="ctr"/>
           <a:lstStyle/>
           <a:p>
-            <a:pPr algn="l" indent="0" marL="0">
+            <a:pPr eaLnBrk="0" algn="l" indent="0" marL="0">
               <a:buNone/>
             </a:pPr>
             <a:r>
@@ -3308,7 +3308,7 @@
           <a:bodyPr wrap="square" lIns="0" tIns="0" rIns="0" bIns="0" rtlCol="0" anchor="ctr"/>
           <a:lstStyle/>
           <a:p>
-            <a:pPr indent="0" marL="0">
+            <a:pPr eaLnBrk="0" indent="0" marL="0">
               <a:spcAft>
                 <a:spcPts val="600"/>
               </a:spcAft>
@@ -3350,7 +3350,7 @@
           <a:bodyPr wrap="square" lIns="0" tIns="0" rIns="0" bIns="0" rtlCol="0" anchor="ctr"/>
           <a:lstStyle/>
           <a:p>
-            <a:pPr algn="ctr" indent="0" marL="0">
+            <a:pPr eaLnBrk="0" algn="ctr" indent="0" marL="0">
               <a:buNone/>
             </a:pPr>
             <a:r>
@@ -3412,7 +3412,7 @@
           <a:bodyPr wrap="square" lIns="0" tIns="0" rIns="0" bIns="0" rtlCol="0" anchor="ctr"/>
           <a:lstStyle/>
           <a:p>
-            <a:pPr algn="ctr" indent="0" marL="0">
+            <a:pPr eaLnBrk="0" algn="ctr" indent="0" marL="0">
               <a:buNone/>
             </a:pPr>
             <a:r>
@@ -3451,7 +3451,7 @@
           <a:bodyPr wrap="square" lIns="0" tIns="0" rIns="0" bIns="0" rtlCol="0" anchor="ctr"/>
           <a:lstStyle/>
           <a:p>
-            <a:pPr algn="ctr" indent="0" marL="0">
+            <a:pPr eaLnBrk="0" algn="ctr" indent="0" marL="0">
               <a:buNone/>
             </a:pPr>
             <a:r>
@@ -3490,7 +3490,7 @@
           <a:bodyPr wrap="square" lIns="0" tIns="0" rIns="0" bIns="0" rtlCol="0" anchor="ctr"/>
           <a:lstStyle/>
           <a:p>
-            <a:pPr algn="ctr" indent="0" marL="0">
+            <a:pPr eaLnBrk="0" algn="ctr" indent="0" marL="0">
               <a:buNone/>
             </a:pPr>
             <a:r>
@@ -3552,7 +3552,7 @@
           <a:bodyPr wrap="square" lIns="0" tIns="0" rIns="0" bIns="0" rtlCol="0" anchor="ctr"/>
           <a:lstStyle/>
           <a:p>
-            <a:pPr algn="ctr" indent="0" marL="0">
+            <a:pPr eaLnBrk="0" algn="ctr" indent="0" marL="0">
               <a:buNone/>
             </a:pPr>
             <a:r>
@@ -3615,7 +3615,7 @@
           <a:bodyPr wrap="square" lIns="0" tIns="0" rIns="0" bIns="0" rtlCol="0" anchor="ctr"/>
           <a:lstStyle/>
           <a:p>
-            <a:pPr algn="ctr" indent="0" marL="0">
+            <a:pPr eaLnBrk="0" algn="ctr" indent="0" marL="0">
               <a:buNone/>
             </a:pPr>
             <a:r>
@@ -3678,7 +3678,7 @@
           <a:bodyPr wrap="square" lIns="0" tIns="0" rIns="0" bIns="0" rtlCol="0" anchor="ctr"/>
           <a:lstStyle/>
           <a:p>
-            <a:pPr algn="ctr" indent="0" marL="0">
+            <a:pPr eaLnBrk="0" algn="ctr" indent="0" marL="0">
               <a:buNone/>
             </a:pPr>
             <a:r>
@@ -3717,7 +3717,7 @@
           <a:bodyPr wrap="square" lIns="0" tIns="0" rIns="0" bIns="0" rtlCol="0" anchor="ctr"/>
           <a:lstStyle/>
           <a:p>
-            <a:pPr algn="ctr" indent="0" marL="0">
+            <a:pPr eaLnBrk="0" algn="ctr" indent="0" marL="0">
               <a:buNone/>
             </a:pPr>
             <a:r>
@@ -3779,7 +3779,7 @@
           <a:bodyPr wrap="square" lIns="0" tIns="0" rIns="0" bIns="0" rtlCol="0" anchor="ctr"/>
           <a:lstStyle/>
           <a:p>
-            <a:pPr algn="ctr" indent="0" marL="0">
+            <a:pPr eaLnBrk="0" algn="ctr" indent="0" marL="0">
               <a:buNone/>
             </a:pPr>
             <a:r>
@@ -3895,7 +3895,7 @@
           <a:bodyPr wrap="square" lIns="0" tIns="0" rIns="0" bIns="0" rtlCol="0" anchor="ctr"/>
           <a:lstStyle/>
           <a:p>
-            <a:pPr algn="ctr" indent="0" marL="0">
+            <a:pPr eaLnBrk="0" algn="ctr" indent="0" marL="0">
               <a:buNone/>
             </a:pPr>
             <a:r>
@@ -3957,7 +3957,7 @@
           <a:bodyPr wrap="square" lIns="0" tIns="0" rIns="0" bIns="0" rtlCol="0" anchor="ctr"/>
           <a:lstStyle/>
           <a:p>
-            <a:pPr algn="ctr" indent="0" marL="0">
+            <a:pPr eaLnBrk="0" algn="ctr" indent="0" marL="0">
               <a:buNone/>
             </a:pPr>
             <a:r>
@@ -4148,7 +4148,7 @@
           <a:bodyPr wrap="square" lIns="0" tIns="0" rIns="0" bIns="0" rtlCol="0" anchor="ctr"/>
           <a:lstStyle/>
           <a:p>
-            <a:pPr indent="0" marL="0">
+            <a:pPr eaLnBrk="0" indent="0" marL="0">
               <a:spcAft>
                 <a:spcPts val="600"/>
               </a:spcAft>
@@ -4208,7 +4208,7 @@
             </a:lvl1pPr>
           </a:lstStyle>
           <a:p>
-            <a:pPr algn="r"/>
+            <a:pPr eaLnBrk="0" algn="r"/>
             <a:fld id="{F7021451-1387-4CA6-816F-3879F97B5CBC}" type="slidenum">
               <a:rPr b="0" lang="en-US"/>
               <a:t>10</a:t>
@@ -4265,7 +4265,7 @@
           <a:bodyPr wrap="square" lIns="0" tIns="0" rIns="0" bIns="0" rtlCol="0" anchor="ctr"/>
           <a:lstStyle/>
           <a:p>
-            <a:pPr algn="l" indent="0" marL="0">
+            <a:pPr eaLnBrk="0" algn="l" indent="0" marL="0">
               <a:buNone/>
             </a:pPr>
             <a:r>
@@ -4304,7 +4304,7 @@
           <a:bodyPr wrap="square" lIns="0" tIns="0" rIns="0" bIns="0" rtlCol="0" anchor="ctr"/>
           <a:lstStyle/>
           <a:p>
-            <a:pPr algn="l" indent="0" marL="0">
+            <a:pPr eaLnBrk="0" algn="l" indent="0" marL="0">
               <a:buNone/>
             </a:pPr>
             <a:r>
@@ -4343,7 +4343,7 @@
           <a:bodyPr wrap="square" lIns="0" tIns="0" rIns="0" bIns="0" rtlCol="0" anchor="ctr"/>
           <a:lstStyle/>
           <a:p>
-            <a:pPr algn="ctr" indent="0" marL="0">
+            <a:pPr eaLnBrk="0" algn="ctr" indent="0" marL="0">
               <a:buNone/>
             </a:pPr>
             <a:r>
@@ -4405,7 +4405,7 @@
           <a:bodyPr wrap="square" lIns="0" tIns="0" rIns="0" bIns="0" rtlCol="0" anchor="ctr"/>
           <a:lstStyle/>
           <a:p>
-            <a:pPr algn="ctr" indent="0" marL="0">
+            <a:pPr eaLnBrk="0" algn="ctr" indent="0" marL="0">
               <a:buNone/>
             </a:pPr>
             <a:r>
@@ -4444,7 +4444,7 @@
           <a:bodyPr wrap="square" lIns="0" tIns="0" rIns="0" bIns="0" rtlCol="0" anchor="ctr"/>
           <a:lstStyle/>
           <a:p>
-            <a:pPr algn="ctr" indent="0" marL="0">
+            <a:pPr eaLnBrk="0" algn="ctr" indent="0" marL="0">
               <a:buNone/>
             </a:pPr>
             <a:r>
@@ -4556,7 +4556,7 @@
           <a:bodyPr wrap="square" lIns="0" tIns="0" rIns="0" bIns="0" rtlCol="0" anchor="ctr"/>
           <a:lstStyle/>
           <a:p>
-            <a:pPr algn="ctr" indent="0" marL="0">
+            <a:pPr eaLnBrk="0" algn="ctr" indent="0" marL="0">
               <a:buNone/>
             </a:pPr>
             <a:r>
@@ -4822,7 +4822,7 @@
           <a:bodyPr wrap="square" lIns="0" tIns="0" rIns="0" bIns="0" rtlCol="0" anchor="ctr"/>
           <a:lstStyle/>
           <a:p>
-            <a:pPr indent="0" marL="0">
+            <a:pPr eaLnBrk="0" indent="0" marL="0">
               <a:spcAft>
                 <a:spcPts val="600"/>
               </a:spcAft>
@@ -4872,7 +4872,7 @@
           <a:bodyPr wrap="square" lIns="177800" tIns="0" rIns="177800" bIns="0" rtlCol="0" anchor="ctr"/>
           <a:lstStyle/>
           <a:p>
-            <a:pPr algn="l" indent="0" marL="0">
+            <a:pPr eaLnBrk="0" algn="l" indent="0" marL="0">
               <a:buNone/>
             </a:pPr>
             <a:r>
@@ -4929,7 +4929,7 @@
             </a:lvl1pPr>
           </a:lstStyle>
           <a:p>
-            <a:pPr algn="r"/>
+            <a:pPr eaLnBrk="0" algn="r"/>
             <a:fld id="{F7021451-1387-4CA6-816F-3879F97B5CBC}" type="slidenum">
               <a:rPr b="0" lang="en-US"/>
               <a:t>11</a:t>
@@ -4986,7 +4986,7 @@
           <a:bodyPr wrap="square" lIns="0" tIns="0" rIns="0" bIns="0" rtlCol="0" anchor="ctr"/>
           <a:lstStyle/>
           <a:p>
-            <a:pPr algn="l" indent="0" marL="0">
+            <a:pPr eaLnBrk="0" algn="l" indent="0" marL="0">
               <a:buNone/>
             </a:pPr>
             <a:r>
@@ -5025,7 +5025,7 @@
           <a:bodyPr wrap="square" lIns="0" tIns="0" rIns="0" bIns="0" rtlCol="0" anchor="ctr"/>
           <a:lstStyle/>
           <a:p>
-            <a:pPr algn="l" indent="0" marL="0">
+            <a:pPr eaLnBrk="0" algn="l" indent="0" marL="0">
               <a:buNone/>
             </a:pPr>
             <a:r>
@@ -5064,7 +5064,7 @@
           <a:bodyPr wrap="square" lIns="0" tIns="0" rIns="0" bIns="0" rtlCol="0" anchor="ctr"/>
           <a:lstStyle/>
           <a:p>
-            <a:pPr algn="ctr" indent="0" marL="0">
+            <a:pPr eaLnBrk="0" algn="ctr" indent="0" marL="0">
               <a:buNone/>
             </a:pPr>
             <a:r>
@@ -5126,7 +5126,7 @@
           <a:bodyPr wrap="square" lIns="0" tIns="0" rIns="0" bIns="0" rtlCol="0" anchor="ctr"/>
           <a:lstStyle/>
           <a:p>
-            <a:pPr algn="ctr" indent="0" marL="0">
+            <a:pPr eaLnBrk="0" algn="ctr" indent="0" marL="0">
               <a:buNone/>
             </a:pPr>
             <a:r>
@@ -5275,7 +5275,7 @@
           <a:bodyPr wrap="square" lIns="0" tIns="0" rIns="0" bIns="0" rtlCol="0" anchor="ctr"/>
           <a:lstStyle/>
           <a:p>
-            <a:pPr algn="ctr" indent="0" marL="0">
+            <a:pPr eaLnBrk="0" algn="ctr" indent="0" marL="0">
               <a:buNone/>
             </a:pPr>
             <a:r>
@@ -5499,7 +5499,7 @@
           <a:bodyPr wrap="square" lIns="0" tIns="0" rIns="0" bIns="0" rtlCol="0" anchor="ctr"/>
           <a:lstStyle/>
           <a:p>
-            <a:pPr algn="ctr" indent="0" marL="0">
+            <a:pPr eaLnBrk="0" algn="ctr" indent="0" marL="0">
               <a:buNone/>
             </a:pPr>
             <a:r>
@@ -5723,7 +5723,7 @@
           <a:bodyPr wrap="square" lIns="0" tIns="0" rIns="0" bIns="0" rtlCol="0" anchor="ctr"/>
           <a:lstStyle/>
           <a:p>
-            <a:pPr algn="ctr" indent="0" marL="0">
+            <a:pPr eaLnBrk="0" algn="ctr" indent="0" marL="0">
               <a:buNone/>
             </a:pPr>
             <a:r>
@@ -5907,7 +5907,7 @@
             </a:lvl1pPr>
           </a:lstStyle>
           <a:p>
-            <a:pPr algn="r"/>
+            <a:pPr eaLnBrk="0" algn="r"/>
             <a:fld id="{F7021451-1387-4CA6-816F-3879F97B5CBC}" type="slidenum">
               <a:rPr b="0" lang="en-US"/>
               <a:t>12</a:t>
@@ -5964,7 +5964,7 @@
           <a:bodyPr wrap="square" lIns="0" tIns="0" rIns="0" bIns="0" rtlCol="0" anchor="ctr"/>
           <a:lstStyle/>
           <a:p>
-            <a:pPr algn="l" indent="0" marL="0">
+            <a:pPr eaLnBrk="0" algn="l" indent="0" marL="0">
               <a:buNone/>
             </a:pPr>
             <a:r>
@@ -6030,7 +6030,7 @@
           <a:bodyPr wrap="square" lIns="0" tIns="0" rIns="0" bIns="0" rtlCol="0" anchor="ctr"/>
           <a:lstStyle/>
           <a:p>
-            <a:pPr indent="0" marL="0">
+            <a:pPr eaLnBrk="0" indent="0" marL="0">
               <a:spcAft>
                 <a:spcPts val="600"/>
               </a:spcAft>
@@ -6080,7 +6080,7 @@
           <a:bodyPr wrap="square" lIns="177800" tIns="0" rIns="177800" bIns="0" rtlCol="0" anchor="ctr"/>
           <a:lstStyle/>
           <a:p>
-            <a:pPr algn="l" indent="0" marL="0">
+            <a:pPr eaLnBrk="0" algn="l" indent="0" marL="0">
               <a:buNone/>
             </a:pPr>
             <a:r>
@@ -6127,7 +6127,7 @@
           <a:bodyPr wrap="square" lIns="177800" tIns="0" rIns="177800" bIns="0" rtlCol="0" anchor="ctr"/>
           <a:lstStyle/>
           <a:p>
-            <a:pPr algn="l" indent="0" marL="0">
+            <a:pPr eaLnBrk="0" algn="l" indent="0" marL="0">
               <a:buNone/>
             </a:pPr>
             <a:r>
@@ -6166,7 +6166,7 @@
           <a:bodyPr wrap="square" lIns="0" tIns="0" rIns="0" bIns="0" rtlCol="0" anchor="ctr"/>
           <a:lstStyle/>
           <a:p>
-            <a:pPr algn="l" indent="0" marL="0">
+            <a:pPr eaLnBrk="0" algn="l" indent="0" marL="0">
               <a:buNone/>
             </a:pPr>
             <a:r>
@@ -6205,7 +6205,7 @@
           <a:bodyPr wrap="square" lIns="0" tIns="0" rIns="0" bIns="0" rtlCol="0" anchor="ctr"/>
           <a:lstStyle/>
           <a:p>
-            <a:pPr algn="ctr" indent="0" marL="0">
+            <a:pPr eaLnBrk="0" algn="ctr" indent="0" marL="0">
               <a:buNone/>
             </a:pPr>
             <a:r>
@@ -6244,7 +6244,7 @@
           <a:bodyPr wrap="square" lIns="0" tIns="0" rIns="0" bIns="0" rtlCol="0" anchor="ctr"/>
           <a:lstStyle/>
           <a:p>
-            <a:pPr algn="ctr" indent="0" marL="0">
+            <a:pPr eaLnBrk="0" algn="ctr" indent="0" marL="0">
               <a:buNone/>
             </a:pPr>
             <a:r>
@@ -6306,7 +6306,7 @@
           <a:bodyPr wrap="square" lIns="0" tIns="0" rIns="0" bIns="0" rtlCol="0" anchor="ctr"/>
           <a:lstStyle/>
           <a:p>
-            <a:pPr algn="ctr" indent="0" marL="0">
+            <a:pPr eaLnBrk="0" algn="ctr" indent="0" marL="0">
               <a:buNone/>
             </a:pPr>
             <a:r>
@@ -6345,7 +6345,7 @@
           <a:bodyPr wrap="square" lIns="0" tIns="0" rIns="0" bIns="0" rtlCol="0" anchor="ctr"/>
           <a:lstStyle/>
           <a:p>
-            <a:pPr algn="ctr" indent="0" marL="0">
+            <a:pPr eaLnBrk="0" algn="ctr" indent="0" marL="0">
               <a:buNone/>
             </a:pPr>
             <a:r>
@@ -6432,7 +6432,7 @@
           <a:bodyPr wrap="square" lIns="0" tIns="0" rIns="0" bIns="0" rtlCol="0" anchor="ctr"/>
           <a:lstStyle/>
           <a:p>
-            <a:pPr algn="ctr" indent="0" marL="0">
+            <a:pPr eaLnBrk="0" algn="ctr" indent="0" marL="0">
               <a:buNone/>
             </a:pPr>
             <a:r>
@@ -6471,7 +6471,7 @@
           <a:bodyPr wrap="square" lIns="0" tIns="0" rIns="0" bIns="0" rtlCol="0" anchor="ctr"/>
           <a:lstStyle/>
           <a:p>
-            <a:pPr algn="ctr" indent="0" marL="0">
+            <a:pPr eaLnBrk="0" algn="ctr" indent="0" marL="0">
               <a:buNone/>
             </a:pPr>
             <a:r>
@@ -6510,7 +6510,7 @@
           <a:bodyPr wrap="square" lIns="0" tIns="0" rIns="0" bIns="0" rtlCol="0" anchor="ctr"/>
           <a:lstStyle/>
           <a:p>
-            <a:pPr algn="ctr" indent="0" marL="0">
+            <a:pPr eaLnBrk="0" algn="ctr" indent="0" marL="0">
               <a:buNone/>
             </a:pPr>
             <a:r>
@@ -6572,7 +6572,7 @@
           <a:bodyPr wrap="square" lIns="0" tIns="0" rIns="0" bIns="0" rtlCol="0" anchor="ctr"/>
           <a:lstStyle/>
           <a:p>
-            <a:pPr algn="ctr" indent="0" marL="0">
+            <a:pPr eaLnBrk="0" algn="ctr" indent="0" marL="0">
               <a:buNone/>
             </a:pPr>
             <a:r>
@@ -6611,7 +6611,7 @@
           <a:bodyPr wrap="square" lIns="0" tIns="0" rIns="0" bIns="0" rtlCol="0" anchor="ctr"/>
           <a:lstStyle/>
           <a:p>
-            <a:pPr algn="ctr" indent="0" marL="0">
+            <a:pPr eaLnBrk="0" algn="ctr" indent="0" marL="0">
               <a:buNone/>
             </a:pPr>
             <a:r>
@@ -6650,7 +6650,7 @@
           <a:bodyPr wrap="square" lIns="0" tIns="0" rIns="0" bIns="0" rtlCol="0" anchor="ctr"/>
           <a:lstStyle/>
           <a:p>
-            <a:pPr algn="ctr" indent="0" marL="0">
+            <a:pPr eaLnBrk="0" algn="ctr" indent="0" marL="0">
               <a:buNone/>
             </a:pPr>
             <a:r>
@@ -6737,7 +6737,7 @@
           <a:bodyPr wrap="square" lIns="0" tIns="0" rIns="0" bIns="0" rtlCol="0" anchor="ctr"/>
           <a:lstStyle/>
           <a:p>
-            <a:pPr algn="l" indent="0" marL="0">
+            <a:pPr eaLnBrk="0" algn="l" indent="0" marL="0">
               <a:buNone/>
             </a:pPr>
             <a:r>
@@ -6776,7 +6776,7 @@
           <a:bodyPr wrap="square" lIns="0" tIns="0" rIns="0" bIns="0" rtlCol="0" anchor="ctr"/>
           <a:lstStyle/>
           <a:p>
-            <a:pPr algn="l" indent="0" marL="0">
+            <a:pPr eaLnBrk="0" algn="l" indent="0" marL="0">
               <a:buNone/>
             </a:pPr>
             <a:r>
@@ -6833,7 +6833,7 @@
             </a:lvl1pPr>
           </a:lstStyle>
           <a:p>
-            <a:pPr algn="r"/>
+            <a:pPr eaLnBrk="0" algn="r"/>
             <a:fld id="{F7021451-1387-4CA6-816F-3879F97B5CBC}" type="slidenum">
               <a:rPr b="0" lang="en-US"/>
               <a:t>13</a:t>
@@ -6890,7 +6890,7 @@
           <a:bodyPr wrap="square" lIns="0" tIns="0" rIns="0" bIns="0" rtlCol="0" anchor="ctr"/>
           <a:lstStyle/>
           <a:p>
-            <a:pPr algn="l" indent="0" marL="0">
+            <a:pPr eaLnBrk="0" algn="l" indent="0" marL="0">
               <a:buNone/>
             </a:pPr>
             <a:r>
@@ -7056,7 +7056,7 @@
           <a:bodyPr wrap="square" lIns="0" tIns="0" rIns="0" bIns="0" rtlCol="0" anchor="ctr"/>
           <a:lstStyle/>
           <a:p>
-            <a:pPr algn="l" indent="0" marL="0">
+            <a:pPr eaLnBrk="0" algn="l" indent="0" marL="0">
               <a:buNone/>
             </a:pPr>
             <a:r>
@@ -7095,7 +7095,7 @@
           <a:bodyPr wrap="square" lIns="0" tIns="0" rIns="0" bIns="0" rtlCol="0" anchor="ctr"/>
           <a:lstStyle/>
           <a:p>
-            <a:pPr algn="ctr" indent="0" marL="0">
+            <a:pPr eaLnBrk="0" algn="ctr" indent="0" marL="0">
               <a:buNone/>
             </a:pPr>
             <a:r>
@@ -7157,7 +7157,7 @@
           <a:bodyPr wrap="square" lIns="0" tIns="0" rIns="0" bIns="0" rtlCol="0" anchor="ctr"/>
           <a:lstStyle/>
           <a:p>
-            <a:pPr algn="ctr" indent="0" marL="0">
+            <a:pPr eaLnBrk="0" algn="ctr" indent="0" marL="0">
               <a:buNone/>
             </a:pPr>
             <a:r>
@@ -7196,7 +7196,7 @@
           <a:bodyPr wrap="square" lIns="0" tIns="0" rIns="0" bIns="0" rtlCol="0" anchor="ctr"/>
           <a:lstStyle/>
           <a:p>
-            <a:pPr algn="l" indent="0" marL="0">
+            <a:pPr eaLnBrk="0" algn="l" indent="0" marL="0">
               <a:buNone/>
             </a:pPr>
             <a:r>
@@ -7235,7 +7235,7 @@
           <a:bodyPr wrap="square" lIns="0" tIns="0" rIns="0" bIns="0" rtlCol="0" anchor="ctr"/>
           <a:lstStyle/>
           <a:p>
-            <a:pPr algn="l" indent="0" marL="0">
+            <a:pPr eaLnBrk="0" algn="l" indent="0" marL="0">
               <a:buNone/>
             </a:pPr>
             <a:r>
@@ -7282,7 +7282,7 @@
           <a:bodyPr wrap="square" lIns="177800" tIns="0" rIns="177800" bIns="0" rtlCol="0" anchor="ctr"/>
           <a:lstStyle/>
           <a:p>
-            <a:pPr algn="l" indent="0" marL="0">
+            <a:pPr eaLnBrk="0" algn="l" indent="0" marL="0">
               <a:buNone/>
             </a:pPr>
             <a:r>
@@ -7423,7 +7423,7 @@
           <a:bodyPr wrap="square" lIns="0" tIns="0" rIns="0" bIns="0" rtlCol="0" anchor="ctr"/>
           <a:lstStyle/>
           <a:p>
-            <a:pPr algn="ctr" indent="0" marL="0">
+            <a:pPr eaLnBrk="0" algn="ctr" indent="0" marL="0">
               <a:buNone/>
             </a:pPr>
             <a:r>
@@ -7687,7 +7687,7 @@
           <a:bodyPr wrap="square" lIns="0" tIns="0" rIns="0" bIns="0" rtlCol="0" anchor="ctr"/>
           <a:lstStyle/>
           <a:p>
-            <a:pPr algn="ctr" indent="0" marL="0">
+            <a:pPr eaLnBrk="0" algn="ctr" indent="0" marL="0">
               <a:buNone/>
             </a:pPr>
             <a:r>
@@ -7817,7 +7817,7 @@
             </a:lvl1pPr>
           </a:lstStyle>
           <a:p>
-            <a:pPr algn="r"/>
+            <a:pPr eaLnBrk="0" algn="r"/>
             <a:fld id="{F7021451-1387-4CA6-816F-3879F97B5CBC}" type="slidenum">
               <a:rPr b="0" lang="en-US"/>
               <a:t>14</a:t>
@@ -7874,7 +7874,7 @@
           <a:bodyPr wrap="square" lIns="0" tIns="0" rIns="0" bIns="0" rtlCol="0" anchor="ctr"/>
           <a:lstStyle/>
           <a:p>
-            <a:pPr algn="l" indent="0" marL="0">
+            <a:pPr eaLnBrk="0" algn="l" indent="0" marL="0">
               <a:buNone/>
             </a:pPr>
             <a:r>
@@ -7913,7 +7913,7 @@
           <a:bodyPr wrap="square" lIns="0" tIns="0" rIns="0" bIns="0" rtlCol="0" anchor="ctr"/>
           <a:lstStyle/>
           <a:p>
-            <a:pPr algn="l" indent="0" marL="0">
+            <a:pPr eaLnBrk="0" algn="l" indent="0" marL="0">
               <a:buNone/>
             </a:pPr>
             <a:r>
@@ -7960,7 +7960,7 @@
           <a:bodyPr wrap="square" lIns="0" tIns="0" rIns="0" bIns="0" rtlCol="0" anchor="ctr"/>
           <a:lstStyle/>
           <a:p>
-            <a:pPr algn="ctr" indent="0" marL="0">
+            <a:pPr eaLnBrk="0" algn="ctr" indent="0" marL="0">
               <a:buNone/>
             </a:pPr>
             <a:r>
@@ -8134,7 +8134,7 @@
           <a:bodyPr wrap="square" lIns="0" tIns="0" rIns="0" bIns="0" rtlCol="0" anchor="ctr"/>
           <a:lstStyle/>
           <a:p>
-            <a:pPr algn="ctr" indent="0" marL="0">
+            <a:pPr eaLnBrk="0" algn="ctr" indent="0" marL="0">
               <a:buNone/>
             </a:pPr>
             <a:r>
@@ -8308,7 +8308,7 @@
           <a:bodyPr wrap="square" lIns="0" tIns="0" rIns="0" bIns="0" rtlCol="0" anchor="ctr"/>
           <a:lstStyle/>
           <a:p>
-            <a:pPr algn="ctr" indent="0" marL="0">
+            <a:pPr eaLnBrk="0" algn="ctr" indent="0" marL="0">
               <a:buNone/>
             </a:pPr>
             <a:r>
@@ -8457,7 +8457,7 @@
           <a:bodyPr wrap="square" lIns="0" tIns="0" rIns="0" bIns="0" rtlCol="0" anchor="ctr"/>
           <a:lstStyle/>
           <a:p>
-            <a:pPr algn="ctr" indent="0" marL="0">
+            <a:pPr eaLnBrk="0" algn="ctr" indent="0" marL="0">
               <a:buNone/>
             </a:pPr>
             <a:r>
@@ -8625,7 +8625,7 @@
           <a:bodyPr wrap="square" lIns="0" tIns="0" rIns="0" bIns="0" rtlCol="0" anchor="ctr"/>
           <a:lstStyle/>
           <a:p>
-            <a:pPr indent="0" marL="0">
+            <a:pPr eaLnBrk="0" indent="0" marL="0">
               <a:spcAft>
                 <a:spcPts val="600"/>
               </a:spcAft>
@@ -8685,7 +8685,7 @@
             </a:lvl1pPr>
           </a:lstStyle>
           <a:p>
-            <a:pPr algn="r"/>
+            <a:pPr eaLnBrk="0" algn="r"/>
             <a:fld id="{F7021451-1387-4CA6-816F-3879F97B5CBC}" type="slidenum">
               <a:rPr b="0" lang="en-US"/>
               <a:t>2</a:t>
@@ -8742,7 +8742,7 @@
           <a:bodyPr wrap="square" lIns="0" tIns="0" rIns="0" bIns="0" rtlCol="0" anchor="ctr"/>
           <a:lstStyle/>
           <a:p>
-            <a:pPr algn="l" indent="0" marL="0">
+            <a:pPr eaLnBrk="0" algn="l" indent="0" marL="0">
               <a:buNone/>
             </a:pPr>
             <a:r>
@@ -8781,7 +8781,7 @@
           <a:bodyPr wrap="square" lIns="0" tIns="0" rIns="0" bIns="0" rtlCol="0" anchor="ctr"/>
           <a:lstStyle/>
           <a:p>
-            <a:pPr algn="l" indent="0" marL="0">
+            <a:pPr eaLnBrk="0" algn="l" indent="0" marL="0">
               <a:buNone/>
             </a:pPr>
             <a:r>
@@ -8828,7 +8828,7 @@
           <a:bodyPr wrap="square" lIns="0" tIns="0" rIns="0" bIns="0" rtlCol="0" anchor="ctr"/>
           <a:lstStyle/>
           <a:p>
-            <a:pPr algn="ctr" indent="0" marL="0">
+            <a:pPr eaLnBrk="0" algn="ctr" indent="0" marL="0">
               <a:buNone/>
             </a:pPr>
             <a:r>
@@ -8944,7 +8944,7 @@
           <a:bodyPr wrap="square" lIns="0" tIns="0" rIns="0" bIns="0" rtlCol="0" anchor="ctr"/>
           <a:lstStyle/>
           <a:p>
-            <a:pPr algn="l" indent="0" marL="0">
+            <a:pPr eaLnBrk="0" algn="l" indent="0" marL="0">
               <a:buNone/>
             </a:pPr>
             <a:r>
@@ -8991,7 +8991,7 @@
           <a:bodyPr wrap="square" lIns="0" tIns="0" rIns="0" bIns="0" rtlCol="0" anchor="ctr"/>
           <a:lstStyle/>
           <a:p>
-            <a:pPr algn="ctr" indent="0" marL="0">
+            <a:pPr eaLnBrk="0" algn="ctr" indent="0" marL="0">
               <a:buNone/>
             </a:pPr>
             <a:r>
@@ -9157,7 +9157,7 @@
           <a:bodyPr wrap="square" lIns="0" tIns="0" rIns="0" bIns="0" rtlCol="0" anchor="ctr"/>
           <a:lstStyle/>
           <a:p>
-            <a:pPr algn="l" indent="0" marL="0">
+            <a:pPr eaLnBrk="0" algn="l" indent="0" marL="0">
               <a:buNone/>
             </a:pPr>
             <a:r>
@@ -9223,7 +9223,7 @@
           <a:bodyPr wrap="square" lIns="0" tIns="0" rIns="0" bIns="0" rtlCol="0" anchor="ctr"/>
           <a:lstStyle/>
           <a:p>
-            <a:pPr indent="0" marL="0">
+            <a:pPr eaLnBrk="0" indent="0" marL="0">
               <a:spcAft>
                 <a:spcPts val="600"/>
               </a:spcAft>
@@ -9283,7 +9283,7 @@
             </a:lvl1pPr>
           </a:lstStyle>
           <a:p>
-            <a:pPr algn="r"/>
+            <a:pPr eaLnBrk="0" algn="r"/>
             <a:fld id="{F7021451-1387-4CA6-816F-3879F97B5CBC}" type="slidenum">
               <a:rPr b="0" lang="en-US"/>
               <a:t>3</a:t>
@@ -9340,7 +9340,7 @@
           <a:bodyPr wrap="square" lIns="0" tIns="0" rIns="0" bIns="0" rtlCol="0" anchor="ctr"/>
           <a:lstStyle/>
           <a:p>
-            <a:pPr algn="l" indent="0" marL="0">
+            <a:pPr eaLnBrk="0" algn="l" indent="0" marL="0">
               <a:buNone/>
             </a:pPr>
             <a:r>
@@ -9385,7 +9385,7 @@
           <a:bodyPr wrap="square" lIns="0" tIns="0" rIns="0" bIns="0" rtlCol="0" anchor="ctr"/>
           <a:lstStyle/>
           <a:p>
-            <a:pPr algn="ctr" indent="0" marL="0">
+            <a:pPr eaLnBrk="0" algn="ctr" indent="0" marL="0">
               <a:buNone/>
             </a:pPr>
             <a:r>
@@ -9424,7 +9424,7 @@
           <a:bodyPr wrap="square" lIns="0" tIns="0" rIns="0" bIns="0" rtlCol="0" anchor="t"/>
           <a:lstStyle/>
           <a:p>
-            <a:pPr indent="0" marL="0">
+            <a:pPr eaLnBrk="0" indent="0" marL="0">
               <a:buNone/>
             </a:pPr>
             <a:r>
@@ -9441,7 +9441,7 @@
             <a:endParaRPr lang="ko-KR" sz="2800" dirty="0"/>
           </a:p>
           <a:p>
-            <a:pPr indent="0" marL="0">
+            <a:pPr eaLnBrk="0" indent="0" marL="0">
               <a:buNone/>
             </a:pPr>
             <a:r>
@@ -9486,7 +9486,7 @@
           <a:bodyPr wrap="square" lIns="0" tIns="0" rIns="0" bIns="0" rtlCol="0" anchor="ctr"/>
           <a:lstStyle/>
           <a:p>
-            <a:pPr algn="ctr" indent="0" marL="0">
+            <a:pPr eaLnBrk="0" algn="ctr" indent="0" marL="0">
               <a:buNone/>
             </a:pPr>
             <a:r>
@@ -9525,7 +9525,7 @@
           <a:bodyPr wrap="square" lIns="0" tIns="0" rIns="0" bIns="0" rtlCol="0" anchor="t"/>
           <a:lstStyle/>
           <a:p>
-            <a:pPr indent="0" marL="0">
+            <a:pPr eaLnBrk="0" indent="0" marL="0">
               <a:buNone/>
             </a:pPr>
             <a:r>
@@ -9570,7 +9570,7 @@
           <a:bodyPr wrap="square" lIns="0" tIns="0" rIns="0" bIns="0" rtlCol="0" anchor="ctr"/>
           <a:lstStyle/>
           <a:p>
-            <a:pPr algn="ctr" indent="0" marL="0">
+            <a:pPr eaLnBrk="0" algn="ctr" indent="0" marL="0">
               <a:buNone/>
             </a:pPr>
             <a:r>
@@ -9609,7 +9609,7 @@
           <a:bodyPr wrap="square" lIns="0" tIns="0" rIns="0" bIns="0" rtlCol="0" anchor="t"/>
           <a:lstStyle/>
           <a:p>
-            <a:pPr indent="0" marL="0">
+            <a:pPr eaLnBrk="0" indent="0" marL="0">
               <a:buNone/>
             </a:pPr>
             <a:r>
@@ -9654,7 +9654,7 @@
           <a:bodyPr wrap="square" lIns="0" tIns="0" rIns="0" bIns="0" rtlCol="0" anchor="ctr"/>
           <a:lstStyle/>
           <a:p>
-            <a:pPr algn="ctr" indent="0" marL="0">
+            <a:pPr eaLnBrk="0" algn="ctr" indent="0" marL="0">
               <a:buNone/>
             </a:pPr>
             <a:r>
@@ -9693,7 +9693,7 @@
           <a:bodyPr wrap="square" lIns="0" tIns="0" rIns="0" bIns="0" rtlCol="0" anchor="t"/>
           <a:lstStyle/>
           <a:p>
-            <a:pPr indent="0" marL="0">
+            <a:pPr eaLnBrk="0" indent="0" marL="0">
               <a:buNone/>
             </a:pPr>
             <a:r>
@@ -9710,7 +9710,7 @@
             <a:endParaRPr lang="ko-KR" sz="2800" dirty="0"/>
           </a:p>
           <a:p>
-            <a:pPr indent="0" marL="0">
+            <a:pPr eaLnBrk="0" indent="0" marL="0">
               <a:buNone/>
             </a:pPr>
             <a:r>
@@ -10088,7 +10088,7 @@
           <a:bodyPr wrap="square" lIns="177800" tIns="0" rIns="177800" bIns="0" rtlCol="0" anchor="ctr"/>
           <a:lstStyle/>
           <a:p>
-            <a:pPr algn="l" indent="0" marL="0">
+            <a:pPr eaLnBrk="0" algn="l" indent="0" marL="0">
               <a:buNone/>
             </a:pPr>
             <a:r>
@@ -10127,7 +10127,7 @@
           <a:bodyPr wrap="square" lIns="0" tIns="0" rIns="0" bIns="0" rtlCol="0" anchor="ctr"/>
           <a:lstStyle/>
           <a:p>
-            <a:pPr algn="l" indent="0" marL="0">
+            <a:pPr eaLnBrk="0" algn="l" indent="0" marL="0">
               <a:buNone/>
             </a:pPr>
             <a:r>
@@ -10184,7 +10184,7 @@
             </a:lvl1pPr>
           </a:lstStyle>
           <a:p>
-            <a:pPr algn="r"/>
+            <a:pPr eaLnBrk="0" algn="r"/>
             <a:fld id="{F7021451-1387-4CA6-816F-3879F97B5CBC}" type="slidenum">
               <a:rPr b="0" lang="en-US"/>
               <a:t>4</a:t>
@@ -10241,7 +10241,7 @@
           <a:bodyPr wrap="square" lIns="0" tIns="0" rIns="0" bIns="0" rtlCol="0" anchor="ctr"/>
           <a:lstStyle/>
           <a:p>
-            <a:pPr algn="l" indent="0" marL="0">
+            <a:pPr eaLnBrk="0" algn="l" indent="0" marL="0">
               <a:buNone/>
             </a:pPr>
             <a:r>
@@ -10280,7 +10280,7 @@
           <a:bodyPr wrap="square" lIns="0" tIns="0" rIns="0" bIns="0" rtlCol="0" anchor="ctr"/>
           <a:lstStyle/>
           <a:p>
-            <a:pPr algn="ctr" indent="0" marL="0">
+            <a:pPr eaLnBrk="0" algn="ctr" indent="0" marL="0">
               <a:buNone/>
             </a:pPr>
             <a:r>
@@ -10342,7 +10342,7 @@
           <a:bodyPr wrap="square" lIns="0" tIns="0" rIns="0" bIns="0" rtlCol="0" anchor="ctr"/>
           <a:lstStyle/>
           <a:p>
-            <a:pPr algn="ctr" indent="0" marL="0">
+            <a:pPr eaLnBrk="0" algn="ctr" indent="0" marL="0">
               <a:buNone/>
             </a:pPr>
             <a:r>
@@ -10458,7 +10458,7 @@
           <a:bodyPr wrap="square" lIns="0" tIns="0" rIns="0" bIns="0" rtlCol="0" anchor="ctr"/>
           <a:lstStyle/>
           <a:p>
-            <a:pPr algn="ctr" indent="0" marL="0">
+            <a:pPr eaLnBrk="0" algn="ctr" indent="0" marL="0">
               <a:buNone/>
             </a:pPr>
             <a:r>
@@ -10520,7 +10520,7 @@
           <a:bodyPr wrap="square" lIns="0" tIns="0" rIns="0" bIns="0" rtlCol="0" anchor="ctr"/>
           <a:lstStyle/>
           <a:p>
-            <a:pPr algn="ctr" indent="0" marL="0">
+            <a:pPr eaLnBrk="0" algn="ctr" indent="0" marL="0">
               <a:buNone/>
             </a:pPr>
             <a:r>
@@ -10736,7 +10736,7 @@
           <a:bodyPr wrap="square" lIns="0" tIns="0" rIns="0" bIns="0" rtlCol="0" anchor="ctr"/>
           <a:lstStyle/>
           <a:p>
-            <a:pPr indent="0" marL="0">
+            <a:pPr eaLnBrk="0" indent="0" marL="0">
               <a:spcAft>
                 <a:spcPts val="600"/>
               </a:spcAft>
@@ -10756,7 +10756,7 @@
             <a:endParaRPr lang="ko-KR" sz="2800" dirty="0"/>
           </a:p>
           <a:p>
-            <a:pPr indent="0" marL="0">
+            <a:pPr eaLnBrk="0" indent="0" marL="0">
               <a:spcAft>
                 <a:spcPts val="600"/>
               </a:spcAft>
@@ -10825,7 +10825,7 @@
           <a:bodyPr wrap="square" lIns="0" tIns="0" rIns="0" bIns="0" rtlCol="0" anchor="ctr"/>
           <a:lstStyle/>
           <a:p>
-            <a:pPr indent="0" marL="0">
+            <a:pPr eaLnBrk="0" indent="0" marL="0">
               <a:spcAft>
                 <a:spcPts val="600"/>
               </a:spcAft>
@@ -10845,7 +10845,7 @@
             <a:endParaRPr lang="ko-KR" sz="2800" dirty="0"/>
           </a:p>
           <a:p>
-            <a:pPr indent="0" marL="0">
+            <a:pPr eaLnBrk="0" indent="0" marL="0">
               <a:spcAft>
                 <a:spcPts val="600"/>
               </a:spcAft>
@@ -10914,7 +10914,7 @@
           <a:bodyPr wrap="square" lIns="0" tIns="0" rIns="0" bIns="0" rtlCol="0" anchor="ctr"/>
           <a:lstStyle/>
           <a:p>
-            <a:pPr indent="0" marL="0">
+            <a:pPr eaLnBrk="0" indent="0" marL="0">
               <a:spcAft>
                 <a:spcPts val="600"/>
               </a:spcAft>
@@ -10934,7 +10934,7 @@
             <a:endParaRPr lang="ko-KR" sz="2800" dirty="0"/>
           </a:p>
           <a:p>
-            <a:pPr indent="0" marL="0">
+            <a:pPr eaLnBrk="0" indent="0" marL="0">
               <a:spcAft>
                 <a:spcPts val="600"/>
               </a:spcAft>
@@ -10994,7 +10994,7 @@
             </a:lvl1pPr>
           </a:lstStyle>
           <a:p>
-            <a:pPr algn="r"/>
+            <a:pPr eaLnBrk="0" algn="r"/>
             <a:fld id="{F7021451-1387-4CA6-816F-3879F97B5CBC}" type="slidenum">
               <a:rPr b="0" lang="en-US"/>
               <a:t>5</a:t>
@@ -11051,7 +11051,7 @@
           <a:bodyPr wrap="square" lIns="0" tIns="0" rIns="0" bIns="0" rtlCol="0" anchor="ctr"/>
           <a:lstStyle/>
           <a:p>
-            <a:pPr algn="l" indent="0" marL="0">
+            <a:pPr eaLnBrk="0" algn="l" indent="0" marL="0">
               <a:buNone/>
             </a:pPr>
             <a:r>
@@ -11090,7 +11090,7 @@
           <a:bodyPr wrap="square" lIns="0" tIns="0" rIns="0" bIns="0" rtlCol="0" anchor="ctr"/>
           <a:lstStyle/>
           <a:p>
-            <a:pPr algn="ctr" indent="0" marL="0">
+            <a:pPr eaLnBrk="0" algn="ctr" indent="0" marL="0">
               <a:buNone/>
             </a:pPr>
             <a:r>
@@ -11152,7 +11152,7 @@
           <a:bodyPr wrap="square" lIns="0" tIns="0" rIns="0" bIns="0" rtlCol="0" anchor="ctr"/>
           <a:lstStyle/>
           <a:p>
-            <a:pPr algn="ctr" indent="0" marL="0">
+            <a:pPr eaLnBrk="0" algn="ctr" indent="0" marL="0">
               <a:buNone/>
             </a:pPr>
             <a:r>
@@ -11268,7 +11268,7 @@
           <a:bodyPr wrap="square" lIns="0" tIns="0" rIns="0" bIns="0" rtlCol="0" anchor="ctr"/>
           <a:lstStyle/>
           <a:p>
-            <a:pPr algn="ctr" indent="0" marL="0">
+            <a:pPr eaLnBrk="0" algn="ctr" indent="0" marL="0">
               <a:buNone/>
             </a:pPr>
             <a:r>
@@ -11330,7 +11330,7 @@
           <a:bodyPr wrap="square" lIns="0" tIns="0" rIns="0" bIns="0" rtlCol="0" anchor="ctr"/>
           <a:lstStyle/>
           <a:p>
-            <a:pPr algn="ctr" indent="0" marL="0">
+            <a:pPr eaLnBrk="0" algn="ctr" indent="0" marL="0">
               <a:buNone/>
             </a:pPr>
             <a:r>
@@ -11496,7 +11496,7 @@
           <a:bodyPr wrap="square" lIns="0" tIns="0" rIns="0" bIns="0" rtlCol="0" anchor="ctr"/>
           <a:lstStyle/>
           <a:p>
-            <a:pPr algn="ctr" indent="0" marL="0">
+            <a:pPr eaLnBrk="0" algn="ctr" indent="0" marL="0">
               <a:buNone/>
             </a:pPr>
             <a:r>
@@ -11558,7 +11558,7 @@
           <a:bodyPr wrap="square" lIns="0" tIns="0" rIns="0" bIns="0" rtlCol="0" anchor="ctr"/>
           <a:lstStyle/>
           <a:p>
-            <a:pPr algn="ctr" indent="0" marL="0">
+            <a:pPr eaLnBrk="0" algn="ctr" indent="0" marL="0">
               <a:buNone/>
             </a:pPr>
             <a:r>
@@ -11797,7 +11797,7 @@
           <a:bodyPr wrap="square" lIns="0" tIns="0" rIns="0" bIns="0" rtlCol="0" anchor="ctr"/>
           <a:lstStyle/>
           <a:p>
-            <a:pPr algn="ctr" indent="0" marL="0">
+            <a:pPr eaLnBrk="0" algn="ctr" indent="0" marL="0">
               <a:buNone/>
             </a:pPr>
             <a:r>
@@ -11859,7 +11859,7 @@
           <a:bodyPr wrap="square" lIns="0" tIns="0" rIns="0" bIns="0" rtlCol="0" anchor="ctr"/>
           <a:lstStyle/>
           <a:p>
-            <a:pPr algn="ctr" indent="0" marL="0">
+            <a:pPr eaLnBrk="0" algn="ctr" indent="0" marL="0">
               <a:buNone/>
             </a:pPr>
             <a:r>
@@ -11898,7 +11898,7 @@
           <a:bodyPr wrap="square" lIns="0" tIns="0" rIns="0" bIns="0" rtlCol="0" anchor="ctr"/>
           <a:lstStyle/>
           <a:p>
-            <a:pPr algn="ctr" indent="0" marL="0">
+            <a:pPr eaLnBrk="0" algn="ctr" indent="0" marL="0">
               <a:buNone/>
             </a:pPr>
             <a:r>
@@ -11937,7 +11937,7 @@
           <a:bodyPr wrap="square" lIns="0" tIns="0" rIns="0" bIns="0" rtlCol="0" anchor="ctr"/>
           <a:lstStyle/>
           <a:p>
-            <a:pPr algn="ctr" indent="0" marL="0">
+            <a:pPr eaLnBrk="0" algn="ctr" indent="0" marL="0">
               <a:buNone/>
             </a:pPr>
             <a:r>
@@ -11999,7 +11999,7 @@
           <a:bodyPr wrap="square" lIns="0" tIns="0" rIns="0" bIns="0" rtlCol="0" anchor="ctr"/>
           <a:lstStyle/>
           <a:p>
-            <a:pPr algn="ctr" indent="0" marL="0">
+            <a:pPr eaLnBrk="0" algn="ctr" indent="0" marL="0">
               <a:buNone/>
             </a:pPr>
             <a:r>
@@ -12038,7 +12038,7 @@
           <a:bodyPr wrap="square" lIns="0" tIns="0" rIns="0" bIns="0" rtlCol="0" anchor="ctr"/>
           <a:lstStyle/>
           <a:p>
-            <a:pPr algn="ctr" indent="0" marL="0">
+            <a:pPr eaLnBrk="0" algn="ctr" indent="0" marL="0">
               <a:buNone/>
             </a:pPr>
             <a:r>
@@ -12077,7 +12077,7 @@
           <a:bodyPr wrap="square" lIns="0" tIns="0" rIns="0" bIns="0" rtlCol="0" anchor="ctr"/>
           <a:lstStyle/>
           <a:p>
-            <a:pPr algn="ctr" indent="0" marL="0">
+            <a:pPr eaLnBrk="0" algn="ctr" indent="0" marL="0">
               <a:buNone/>
             </a:pPr>
             <a:r>
@@ -12139,7 +12139,7 @@
           <a:bodyPr wrap="square" lIns="0" tIns="0" rIns="0" bIns="0" rtlCol="0" anchor="ctr"/>
           <a:lstStyle/>
           <a:p>
-            <a:pPr algn="ctr" indent="0" marL="0">
+            <a:pPr eaLnBrk="0" algn="ctr" indent="0" marL="0">
               <a:buNone/>
             </a:pPr>
             <a:r>
@@ -12205,7 +12205,7 @@
           <a:bodyPr wrap="square" lIns="0" tIns="0" rIns="0" bIns="0" rtlCol="0" anchor="ctr"/>
           <a:lstStyle/>
           <a:p>
-            <a:pPr indent="0" marL="0">
+            <a:pPr eaLnBrk="0" indent="0" marL="0">
               <a:spcAft>
                 <a:spcPts val="600"/>
               </a:spcAft>
@@ -12265,7 +12265,7 @@
             </a:lvl1pPr>
           </a:lstStyle>
           <a:p>
-            <a:pPr algn="r"/>
+            <a:pPr eaLnBrk="0" algn="r"/>
             <a:fld id="{F7021451-1387-4CA6-816F-3879F97B5CBC}" type="slidenum">
               <a:rPr b="0" lang="en-US"/>
               <a:t>6</a:t>
@@ -12322,7 +12322,7 @@
           <a:bodyPr wrap="square" lIns="0" tIns="0" rIns="0" bIns="0" rtlCol="0" anchor="ctr"/>
           <a:lstStyle/>
           <a:p>
-            <a:pPr algn="l" indent="0" marL="0">
+            <a:pPr eaLnBrk="0" algn="l" indent="0" marL="0">
               <a:buNone/>
             </a:pPr>
             <a:r>
@@ -12438,7 +12438,7 @@
           <a:bodyPr wrap="square" lIns="0" tIns="0" rIns="0" bIns="0" rtlCol="0" anchor="ctr"/>
           <a:lstStyle/>
           <a:p>
-            <a:pPr algn="l" indent="0" marL="0">
+            <a:pPr eaLnBrk="0" algn="l" indent="0" marL="0">
               <a:buNone/>
             </a:pPr>
             <a:r>
@@ -12604,7 +12604,7 @@
           <a:bodyPr wrap="square" lIns="0" tIns="0" rIns="0" bIns="0" rtlCol="0" anchor="ctr"/>
           <a:lstStyle/>
           <a:p>
-            <a:pPr algn="ctr" indent="0" marL="0">
+            <a:pPr eaLnBrk="0" algn="ctr" indent="0" marL="0">
               <a:buNone/>
             </a:pPr>
             <a:r>
@@ -12666,7 +12666,7 @@
           <a:bodyPr wrap="square" lIns="0" tIns="0" rIns="0" bIns="0" rtlCol="0" anchor="ctr"/>
           <a:lstStyle/>
           <a:p>
-            <a:pPr algn="ctr" indent="0" marL="0">
+            <a:pPr eaLnBrk="0" algn="ctr" indent="0" marL="0">
               <a:buNone/>
             </a:pPr>
             <a:r>
@@ -12705,7 +12705,7 @@
           <a:bodyPr wrap="square" lIns="0" tIns="0" rIns="0" bIns="0" rtlCol="0" anchor="ctr"/>
           <a:lstStyle/>
           <a:p>
-            <a:pPr algn="ctr" indent="0" marL="0">
+            <a:pPr eaLnBrk="0" algn="ctr" indent="0" marL="0">
               <a:buNone/>
             </a:pPr>
             <a:r>
@@ -12744,7 +12744,7 @@
           <a:bodyPr wrap="square" lIns="0" tIns="0" rIns="0" bIns="0" rtlCol="0" anchor="ctr"/>
           <a:lstStyle/>
           <a:p>
-            <a:pPr algn="ctr" indent="0" marL="0">
+            <a:pPr eaLnBrk="0" algn="ctr" indent="0" marL="0">
               <a:buNone/>
             </a:pPr>
             <a:r>
@@ -12806,7 +12806,7 @@
           <a:bodyPr wrap="square" lIns="0" tIns="0" rIns="0" bIns="0" rtlCol="0" anchor="ctr"/>
           <a:lstStyle/>
           <a:p>
-            <a:pPr algn="ctr" indent="0" marL="0">
+            <a:pPr eaLnBrk="0" algn="ctr" indent="0" marL="0">
               <a:buNone/>
             </a:pPr>
             <a:r>
@@ -12869,7 +12869,7 @@
           <a:bodyPr wrap="square" lIns="0" tIns="0" rIns="0" bIns="0" rtlCol="0" anchor="ctr"/>
           <a:lstStyle/>
           <a:p>
-            <a:pPr algn="ctr" indent="0" marL="0">
+            <a:pPr eaLnBrk="0" algn="ctr" indent="0" marL="0">
               <a:buNone/>
             </a:pPr>
             <a:r>
@@ -12932,7 +12932,7 @@
           <a:bodyPr wrap="square" lIns="0" tIns="0" rIns="0" bIns="0" rtlCol="0" anchor="ctr"/>
           <a:lstStyle/>
           <a:p>
-            <a:pPr algn="ctr" indent="0" marL="0">
+            <a:pPr eaLnBrk="0" algn="ctr" indent="0" marL="0">
               <a:buNone/>
             </a:pPr>
             <a:r>
@@ -12971,7 +12971,7 @@
           <a:bodyPr wrap="square" lIns="0" tIns="0" rIns="0" bIns="0" rtlCol="0" anchor="ctr"/>
           <a:lstStyle/>
           <a:p>
-            <a:pPr algn="ctr" indent="0" marL="0">
+            <a:pPr eaLnBrk="0" algn="ctr" indent="0" marL="0">
               <a:buNone/>
             </a:pPr>
             <a:r>
@@ -13033,7 +13033,7 @@
           <a:bodyPr wrap="square" lIns="0" tIns="0" rIns="0" bIns="0" rtlCol="0" anchor="ctr"/>
           <a:lstStyle/>
           <a:p>
-            <a:pPr algn="ctr" indent="0" marL="0">
+            <a:pPr eaLnBrk="0" algn="ctr" indent="0" marL="0">
               <a:buNone/>
             </a:pPr>
             <a:r>
@@ -13072,7 +13072,7 @@
           <a:bodyPr wrap="square" lIns="0" tIns="0" rIns="0" bIns="0" rtlCol="0" anchor="ctr"/>
           <a:lstStyle/>
           <a:p>
-            <a:pPr algn="ctr" indent="0" marL="0">
+            <a:pPr eaLnBrk="0" algn="ctr" indent="0" marL="0">
               <a:buNone/>
             </a:pPr>
             <a:r>
@@ -13111,7 +13111,7 @@
           <a:bodyPr wrap="square" lIns="0" tIns="0" rIns="0" bIns="0" rtlCol="0" anchor="ctr"/>
           <a:lstStyle/>
           <a:p>
-            <a:pPr algn="ctr" indent="0" marL="0">
+            <a:pPr eaLnBrk="0" algn="ctr" indent="0" marL="0">
               <a:buNone/>
             </a:pPr>
             <a:r>
@@ -13173,7 +13173,7 @@
           <a:bodyPr wrap="square" lIns="0" tIns="0" rIns="0" bIns="0" rtlCol="0" anchor="ctr"/>
           <a:lstStyle/>
           <a:p>
-            <a:pPr algn="ctr" indent="0" marL="0">
+            <a:pPr eaLnBrk="0" algn="ctr" indent="0" marL="0">
               <a:buNone/>
             </a:pPr>
             <a:r>
@@ -13236,7 +13236,7 @@
           <a:bodyPr wrap="square" lIns="0" tIns="0" rIns="0" bIns="0" rtlCol="0" anchor="ctr"/>
           <a:lstStyle/>
           <a:p>
-            <a:pPr algn="ctr" indent="0" marL="0">
+            <a:pPr eaLnBrk="0" algn="ctr" indent="0" marL="0">
               <a:buNone/>
             </a:pPr>
             <a:r>
@@ -13299,7 +13299,7 @@
           <a:bodyPr wrap="square" lIns="0" tIns="0" rIns="0" bIns="0" rtlCol="0" anchor="ctr"/>
           <a:lstStyle/>
           <a:p>
-            <a:pPr algn="ctr" indent="0" marL="0">
+            <a:pPr eaLnBrk="0" algn="ctr" indent="0" marL="0">
               <a:buNone/>
             </a:pPr>
             <a:r>
@@ -13365,7 +13365,7 @@
           <a:bodyPr wrap="square" lIns="0" tIns="0" rIns="0" bIns="0" rtlCol="0" anchor="ctr"/>
           <a:lstStyle/>
           <a:p>
-            <a:pPr indent="0" marL="0">
+            <a:pPr eaLnBrk="0" indent="0" marL="0">
               <a:spcAft>
                 <a:spcPts val="600"/>
               </a:spcAft>
@@ -13407,7 +13407,7 @@
           <a:bodyPr wrap="square" lIns="0" tIns="0" rIns="0" bIns="0" rtlCol="0" anchor="ctr"/>
           <a:lstStyle/>
           <a:p>
-            <a:pPr algn="l" indent="0" marL="0">
+            <a:pPr eaLnBrk="0" algn="l" indent="0" marL="0">
               <a:buNone/>
             </a:pPr>
             <a:r>
@@ -13464,7 +13464,7 @@
             </a:lvl1pPr>
           </a:lstStyle>
           <a:p>
-            <a:pPr algn="r"/>
+            <a:pPr eaLnBrk="0" algn="r"/>
             <a:fld id="{F7021451-1387-4CA6-816F-3879F97B5CBC}" type="slidenum">
               <a:rPr b="0" lang="en-US"/>
               <a:t>7</a:t>
@@ -13521,7 +13521,7 @@
           <a:bodyPr wrap="square" lIns="0" tIns="0" rIns="0" bIns="0" rtlCol="0" anchor="ctr"/>
           <a:lstStyle/>
           <a:p>
-            <a:pPr algn="l" indent="0" marL="0">
+            <a:pPr eaLnBrk="0" algn="l" indent="0" marL="0">
               <a:buNone/>
             </a:pPr>
             <a:r>
@@ -13787,7 +13787,7 @@
           <a:bodyPr wrap="square" lIns="0" tIns="0" rIns="0" bIns="0" rtlCol="0" anchor="ctr"/>
           <a:lstStyle/>
           <a:p>
-            <a:pPr algn="l" indent="0" marL="0">
+            <a:pPr eaLnBrk="0" algn="l" indent="0" marL="0">
               <a:buNone/>
             </a:pPr>
             <a:r>
@@ -13953,7 +13953,7 @@
           <a:bodyPr wrap="square" lIns="0" tIns="0" rIns="0" bIns="0" rtlCol="0" anchor="ctr"/>
           <a:lstStyle/>
           <a:p>
-            <a:pPr algn="ctr" indent="0" marL="0">
+            <a:pPr eaLnBrk="0" algn="ctr" indent="0" marL="0">
               <a:buNone/>
             </a:pPr>
             <a:r>
@@ -14015,7 +14015,7 @@
           <a:bodyPr wrap="square" lIns="0" tIns="0" rIns="0" bIns="0" rtlCol="0" anchor="ctr"/>
           <a:lstStyle/>
           <a:p>
-            <a:pPr algn="ctr" indent="0" marL="0">
+            <a:pPr eaLnBrk="0" algn="ctr" indent="0" marL="0">
               <a:buNone/>
             </a:pPr>
             <a:r>
@@ -14054,7 +14054,7 @@
           <a:bodyPr wrap="square" lIns="0" tIns="0" rIns="0" bIns="0" rtlCol="0" anchor="ctr"/>
           <a:lstStyle/>
           <a:p>
-            <a:pPr algn="ctr" indent="0" marL="0">
+            <a:pPr eaLnBrk="0" algn="ctr" indent="0" marL="0">
               <a:buNone/>
             </a:pPr>
             <a:r>
@@ -14093,7 +14093,7 @@
           <a:bodyPr wrap="square" lIns="0" tIns="0" rIns="0" bIns="0" rtlCol="0" anchor="ctr"/>
           <a:lstStyle/>
           <a:p>
-            <a:pPr algn="ctr" indent="0" marL="0">
+            <a:pPr eaLnBrk="0" algn="ctr" indent="0" marL="0">
               <a:buNone/>
             </a:pPr>
             <a:r>
@@ -14155,7 +14155,7 @@
           <a:bodyPr wrap="square" lIns="0" tIns="0" rIns="0" bIns="0" rtlCol="0" anchor="ctr"/>
           <a:lstStyle/>
           <a:p>
-            <a:pPr algn="ctr" indent="0" marL="0">
+            <a:pPr eaLnBrk="0" algn="ctr" indent="0" marL="0">
               <a:buNone/>
             </a:pPr>
             <a:r>
@@ -14218,7 +14218,7 @@
           <a:bodyPr wrap="square" lIns="0" tIns="0" rIns="0" bIns="0" rtlCol="0" anchor="ctr"/>
           <a:lstStyle/>
           <a:p>
-            <a:pPr algn="ctr" indent="0" marL="0">
+            <a:pPr eaLnBrk="0" algn="ctr" indent="0" marL="0">
               <a:buNone/>
             </a:pPr>
             <a:r>
@@ -14281,7 +14281,7 @@
           <a:bodyPr wrap="square" lIns="0" tIns="0" rIns="0" bIns="0" rtlCol="0" anchor="ctr"/>
           <a:lstStyle/>
           <a:p>
-            <a:pPr algn="ctr" indent="0" marL="0">
+            <a:pPr eaLnBrk="0" algn="ctr" indent="0" marL="0">
               <a:buNone/>
             </a:pPr>
             <a:r>
@@ -14347,7 +14347,7 @@
           <a:bodyPr wrap="square" lIns="0" tIns="0" rIns="0" bIns="0" rtlCol="0" anchor="ctr"/>
           <a:lstStyle/>
           <a:p>
-            <a:pPr indent="0" marL="0">
+            <a:pPr eaLnBrk="0" indent="0" marL="0">
               <a:spcAft>
                 <a:spcPts val="600"/>
               </a:spcAft>
@@ -14397,7 +14397,7 @@
           <a:bodyPr wrap="square" lIns="177800" tIns="0" rIns="177800" bIns="0" rtlCol="0" anchor="ctr"/>
           <a:lstStyle/>
           <a:p>
-            <a:pPr algn="l" indent="0" marL="0">
+            <a:pPr eaLnBrk="0" algn="l" indent="0" marL="0">
               <a:buNone/>
             </a:pPr>
             <a:r>
@@ -14454,7 +14454,7 @@
             </a:lvl1pPr>
           </a:lstStyle>
           <a:p>
-            <a:pPr algn="r"/>
+            <a:pPr eaLnBrk="0" algn="r"/>
             <a:fld id="{F7021451-1387-4CA6-816F-3879F97B5CBC}" type="slidenum">
               <a:rPr b="0" lang="en-US"/>
               <a:t>8</a:t>
@@ -14511,7 +14511,7 @@
           <a:bodyPr wrap="square" lIns="0" tIns="0" rIns="0" bIns="0" rtlCol="0" anchor="ctr"/>
           <a:lstStyle/>
           <a:p>
-            <a:pPr algn="l" indent="0" marL="0">
+            <a:pPr eaLnBrk="0" algn="l" indent="0" marL="0">
               <a:buNone/>
             </a:pPr>
             <a:r>
@@ -14558,7 +14558,7 @@
           <a:bodyPr wrap="square" lIns="0" tIns="0" rIns="0" bIns="0" rtlCol="0" anchor="ctr"/>
           <a:lstStyle/>
           <a:p>
-            <a:pPr algn="ctr" indent="0" marL="0">
+            <a:pPr eaLnBrk="0" algn="ctr" indent="0" marL="0">
               <a:buNone/>
             </a:pPr>
             <a:r>
@@ -14597,7 +14597,7 @@
           <a:bodyPr wrap="square" lIns="0" tIns="0" rIns="0" bIns="0" rtlCol="0" anchor="ctr"/>
           <a:lstStyle/>
           <a:p>
-            <a:pPr algn="ctr" indent="0" marL="0">
+            <a:pPr eaLnBrk="0" algn="ctr" indent="0" marL="0">
               <a:buNone/>
             </a:pPr>
             <a:r>
@@ -14659,7 +14659,7 @@
           <a:bodyPr wrap="square" lIns="0" tIns="0" rIns="0" bIns="0" rtlCol="0" anchor="ctr"/>
           <a:lstStyle/>
           <a:p>
-            <a:pPr algn="ctr" indent="0" marL="0">
+            <a:pPr eaLnBrk="0" algn="ctr" indent="0" marL="0">
               <a:buNone/>
             </a:pPr>
             <a:r>
@@ -14698,7 +14698,7 @@
           <a:bodyPr wrap="square" lIns="0" tIns="0" rIns="0" bIns="0" rtlCol="0" anchor="ctr"/>
           <a:lstStyle/>
           <a:p>
-            <a:pPr algn="ctr" indent="0" marL="0">
+            <a:pPr eaLnBrk="0" algn="ctr" indent="0" marL="0">
               <a:buNone/>
             </a:pPr>
             <a:r>
@@ -14785,7 +14785,7 @@
           <a:bodyPr wrap="square" lIns="0" tIns="0" rIns="0" bIns="0" rtlCol="0" anchor="ctr"/>
           <a:lstStyle/>
           <a:p>
-            <a:pPr algn="ctr" indent="0" marL="0">
+            <a:pPr eaLnBrk="0" algn="ctr" indent="0" marL="0">
               <a:buNone/>
             </a:pPr>
             <a:r>
@@ -14832,7 +14832,7 @@
           <a:bodyPr wrap="square" lIns="0" tIns="0" rIns="0" bIns="0" rtlCol="0" anchor="ctr"/>
           <a:lstStyle/>
           <a:p>
-            <a:pPr algn="ctr" indent="0" marL="0">
+            <a:pPr eaLnBrk="0" algn="ctr" indent="0" marL="0">
               <a:buNone/>
             </a:pPr>
             <a:r>
@@ -14871,7 +14871,7 @@
           <a:bodyPr wrap="square" lIns="0" tIns="0" rIns="0" bIns="0" rtlCol="0" anchor="ctr"/>
           <a:lstStyle/>
           <a:p>
-            <a:pPr algn="ctr" indent="0" marL="0">
+            <a:pPr eaLnBrk="0" algn="ctr" indent="0" marL="0">
               <a:buNone/>
             </a:pPr>
             <a:r>
@@ -14933,7 +14933,7 @@
           <a:bodyPr wrap="square" lIns="0" tIns="0" rIns="0" bIns="0" rtlCol="0" anchor="ctr"/>
           <a:lstStyle/>
           <a:p>
-            <a:pPr algn="ctr" indent="0" marL="0">
+            <a:pPr eaLnBrk="0" algn="ctr" indent="0" marL="0">
               <a:buNone/>
             </a:pPr>
             <a:r>
@@ -14972,7 +14972,7 @@
           <a:bodyPr wrap="square" lIns="0" tIns="0" rIns="0" bIns="0" rtlCol="0" anchor="ctr"/>
           <a:lstStyle/>
           <a:p>
-            <a:pPr algn="ctr" indent="0" marL="0">
+            <a:pPr eaLnBrk="0" algn="ctr" indent="0" marL="0">
               <a:buNone/>
             </a:pPr>
             <a:r>
@@ -15011,7 +15011,7 @@
           <a:bodyPr wrap="square" lIns="0" tIns="0" rIns="0" bIns="0" rtlCol="0" anchor="ctr"/>
           <a:lstStyle/>
           <a:p>
-            <a:pPr algn="ctr" indent="0" marL="0">
+            <a:pPr eaLnBrk="0" algn="ctr" indent="0" marL="0">
               <a:buNone/>
             </a:pPr>
             <a:r>
@@ -15106,7 +15106,7 @@
           <a:bodyPr wrap="square" lIns="0" tIns="0" rIns="0" bIns="0" rtlCol="0" anchor="ctr"/>
           <a:lstStyle/>
           <a:p>
-            <a:pPr algn="ctr" indent="0" marL="0">
+            <a:pPr eaLnBrk="0" algn="ctr" indent="0" marL="0">
               <a:buNone/>
             </a:pPr>
             <a:r>
@@ -15145,7 +15145,7 @@
           <a:bodyPr wrap="square" lIns="0" tIns="0" rIns="0" bIns="0" rtlCol="0" anchor="ctr"/>
           <a:lstStyle/>
           <a:p>
-            <a:pPr algn="ctr" indent="0" marL="0">
+            <a:pPr eaLnBrk="0" algn="ctr" indent="0" marL="0">
               <a:buNone/>
             </a:pPr>
             <a:r>
@@ -15207,7 +15207,7 @@
           <a:bodyPr wrap="square" lIns="0" tIns="0" rIns="0" bIns="0" rtlCol="0" anchor="ctr"/>
           <a:lstStyle/>
           <a:p>
-            <a:pPr algn="ctr" indent="0" marL="0">
+            <a:pPr eaLnBrk="0" algn="ctr" indent="0" marL="0">
               <a:buNone/>
             </a:pPr>
             <a:r>
@@ -15246,7 +15246,7 @@
           <a:bodyPr wrap="square" lIns="0" tIns="0" rIns="0" bIns="0" rtlCol="0" anchor="ctr"/>
           <a:lstStyle/>
           <a:p>
-            <a:pPr algn="ctr" indent="0" marL="0">
+            <a:pPr eaLnBrk="0" algn="ctr" indent="0" marL="0">
               <a:buNone/>
             </a:pPr>
             <a:r>
@@ -15285,7 +15285,7 @@
           <a:bodyPr wrap="square" lIns="0" tIns="0" rIns="0" bIns="0" rtlCol="0" anchor="ctr"/>
           <a:lstStyle/>
           <a:p>
-            <a:pPr algn="ctr" indent="0" marL="0">
+            <a:pPr eaLnBrk="0" algn="ctr" indent="0" marL="0">
               <a:buNone/>
             </a:pPr>
             <a:r>
@@ -15399,7 +15399,7 @@
           <a:bodyPr wrap="square" lIns="0" tIns="0" rIns="0" bIns="0" rtlCol="0" anchor="t"/>
           <a:lstStyle/>
           <a:p>
-            <a:pPr indent="0" marL="0">
+            <a:pPr eaLnBrk="0" indent="0" marL="0">
               <a:spcAft>
                 <a:spcPts val="600"/>
               </a:spcAft>
@@ -15720,7 +15720,7 @@
           <a:bodyPr wrap="square" lIns="0" tIns="0" rIns="0" bIns="0" rtlCol="0" anchor="ctr"/>
           <a:lstStyle/>
           <a:p>
-            <a:pPr algn="l" indent="0" marL="0">
+            <a:pPr eaLnBrk="0" algn="l" indent="0" marL="0">
               <a:buNone/>
             </a:pPr>
             <a:r>
@@ -15767,7 +15767,7 @@
           <a:bodyPr wrap="square" lIns="177800" tIns="0" rIns="177800" bIns="0" rtlCol="0" anchor="ctr"/>
           <a:lstStyle/>
           <a:p>
-            <a:pPr algn="l" indent="0" marL="0">
+            <a:pPr eaLnBrk="0" algn="l" indent="0" marL="0">
               <a:buNone/>
             </a:pPr>
             <a:r>
@@ -15824,7 +15824,7 @@
             </a:lvl1pPr>
           </a:lstStyle>
           <a:p>
-            <a:pPr algn="r"/>
+            <a:pPr eaLnBrk="0" algn="r"/>
             <a:fld id="{F7021451-1387-4CA6-816F-3879F97B5CBC}" type="slidenum">
               <a:rPr b="0" lang="en-US"/>
               <a:t>9</a:t>

--- a/dist/초5/수학/분수의성질/초5_수학_분수의성질_01_크기가같은분수_학생용.pptx
+++ b/dist/초5/수학/분수의성질/초5_수학_분수의성질_01_크기가같은분수_학생용.pptx
@@ -120,13 +120,13 @@
   <p:extLst>
     <p:ext uri="{521415D9-36F7-43E2-AB2F-B90AF26B5E84}">
       <p14:sectionLst xmlns:p14="http://schemas.microsoft.com/office/powerpoint/2010/main">
-        <p14:section name="도입" id="{61ed48ed-1149-321b-1ab3-8b79f78e7f4a}">
+        <p14:section name="도입" id="{fae793a1-d1fd-5db2-0998-653a482aa431}">
           <p14:sldIdLst>
             <p14:sldId id="256"/>
             <p14:sldId id="257"/>
           </p14:sldIdLst>
         </p14:section>
-        <p14:section name="개념" id="{1661abe4-548d-75c2-ab3b-717122962a73}">
+        <p14:section name="개념" id="{74dce9f4-251a-05c7-8657-78c65ef57c76}">
           <p14:sldIdLst>
             <p14:sldId id="258"/>
             <p14:sldId id="259"/>
@@ -136,24 +136,24 @@
             <p14:sldId id="263"/>
           </p14:sldIdLst>
         </p14:section>
-        <p14:section name="연습" id="{e7c9ba66-587d-c358-6706-b5f21ef2f1c9}">
+        <p14:section name="연습" id="{e5bc9a6a-a620-f93e-a450-342ea1f907d6}">
           <p14:sldIdLst>
             <p14:sldId id="264"/>
             <p14:sldId id="265"/>
           </p14:sldIdLst>
         </p14:section>
-        <p14:section name="확인" id="{2dc3a787-fed7-8e18-f29b-9889449f1bd4}">
+        <p14:section name="확인" id="{f9dd1daf-0a61-4881-6c06-67b48f4b2c10}">
           <p14:sldIdLst>
             <p14:sldId id="266"/>
             <p14:sldId id="267"/>
           </p14:sldIdLst>
         </p14:section>
-        <p14:section name="정리" id="{4e5ad4d1-aa67-95ba-403a-7081d8d4ce19}">
+        <p14:section name="정리" id="{bfe73a62-8048-8701-8ffe-f237d7d273f2}">
           <p14:sldIdLst>
             <p14:sldId id="268"/>
           </p14:sldIdLst>
         </p14:section>
-        <p14:section name="보충" id="{834c9711-ec5c-eb97-900f-24f8fc6525db}">
+        <p14:section name="보충" id="{ce3ab718-2f8d-e31f-dbb3-79a262baad31}">
           <p14:sldIdLst>
             <p14:sldId id="269"/>
           </p14:sldIdLst>
@@ -2954,7 +2954,7 @@
         <p:spPr>
           <a:xfrm>
             <a:off x="8609076" y="1371600"/>
-            <a:ext cx="896112" cy="1871472"/>
+            <a:ext cx="1033272" cy="1871472"/>
           </a:xfrm>
           <a:prstGeom prst="rect">
             <a:avLst/>
@@ -2992,7 +2992,7 @@
         </p:nvSpPr>
         <p:spPr>
           <a:xfrm>
-            <a:off x="9614916" y="1371600"/>
+            <a:off x="9752076" y="1371600"/>
             <a:ext cx="909828" cy="899160"/>
           </a:xfrm>
           <a:prstGeom prst="rect">
@@ -3031,7 +3031,7 @@
         </p:nvSpPr>
         <p:spPr>
           <a:xfrm>
-            <a:off x="9651492" y="2307336"/>
+            <a:off x="9788652" y="2307336"/>
             <a:ext cx="836676" cy="0"/>
           </a:xfrm>
           <a:prstGeom prst="line">
@@ -3054,7 +3054,7 @@
         </p:nvSpPr>
         <p:spPr>
           <a:xfrm>
-            <a:off x="9614916" y="2343912"/>
+            <a:off x="9752076" y="2343912"/>
             <a:ext cx="909828" cy="899160"/>
           </a:xfrm>
           <a:prstGeom prst="rect">
@@ -13372,7 +13372,7 @@
               <a:buNone/>
             </a:pPr>
             <a:r>
-              <a:rPr lang="ko-KR" altLang="en-US" sz="2800" dirty="0">
+              <a:rPr lang="ko-KR" altLang="en-US" sz="2200" dirty="0">
                 <a:solidFill>
                   <a:srgbClr val="1F2937"/>
                 </a:solidFill>
@@ -13382,7 +13382,7 @@
               </a:rPr>
               <a:t>분자와 분모에 0이 아닌 같은 수를 곱하면 크기가 같은 분수가 돼요.</a:t>
             </a:r>
-            <a:endParaRPr lang="ko-KR" sz="2800" dirty="0"/>
+            <a:endParaRPr lang="ko-KR" sz="2200" dirty="0"/>
           </a:p>
         </p:txBody>
       </p:sp>
